--- a/doc/ppt/CloudDrive_專題報告_v3.0.pptx
+++ b/doc/ppt/CloudDrive_專題報告_v3.0.pptx
@@ -3414,7 +3414,7 @@
         <p:spPr>
           <a:xfrm>
             <a:off x="1051560" y="4261104"/>
-            <a:ext cx="2331720" cy="420624"/>
+            <a:ext cx="2414016" cy="420624"/>
           </a:xfrm>
           <a:prstGeom prst="roundRect">
             <a:avLst>
@@ -3441,7 +3441,7 @@
         <p:spPr>
           <a:xfrm>
             <a:off x="1106424" y="4261104"/>
-            <a:ext cx="2221992" cy="420624"/>
+            <a:ext cx="2304288" cy="420624"/>
           </a:xfrm>
           <a:prstGeom prst="rect">
             <a:avLst/>
@@ -3479,8 +3479,8 @@
         </p:nvSpPr>
         <p:spPr>
           <a:xfrm>
-            <a:off x="3538728" y="4261104"/>
-            <a:ext cx="2331720" cy="420624"/>
+            <a:off x="3611880" y="4261104"/>
+            <a:ext cx="2414016" cy="420624"/>
           </a:xfrm>
           <a:prstGeom prst="roundRect">
             <a:avLst>
@@ -3506,8 +3506,8 @@
         </p:nvSpPr>
         <p:spPr>
           <a:xfrm>
-            <a:off x="3593592" y="4261104"/>
-            <a:ext cx="2221992" cy="420624"/>
+            <a:off x="3666744" y="4261104"/>
+            <a:ext cx="2304288" cy="420624"/>
           </a:xfrm>
           <a:prstGeom prst="rect">
             <a:avLst/>
@@ -3545,8 +3545,8 @@
         </p:nvSpPr>
         <p:spPr>
           <a:xfrm>
-            <a:off x="6025896" y="4261104"/>
-            <a:ext cx="2331720" cy="420624"/>
+            <a:off x="6172200" y="4261104"/>
+            <a:ext cx="2414016" cy="420624"/>
           </a:xfrm>
           <a:prstGeom prst="roundRect">
             <a:avLst>
@@ -3572,8 +3572,8 @@
         </p:nvSpPr>
         <p:spPr>
           <a:xfrm>
-            <a:off x="6080760" y="4261104"/>
-            <a:ext cx="2221992" cy="420624"/>
+            <a:off x="6227064" y="4261104"/>
+            <a:ext cx="2304288" cy="420624"/>
           </a:xfrm>
           <a:prstGeom prst="rect">
             <a:avLst/>
@@ -3611,8 +3611,8 @@
         </p:nvSpPr>
         <p:spPr>
           <a:xfrm>
-            <a:off x="8513064" y="4261104"/>
-            <a:ext cx="2331720" cy="420624"/>
+            <a:off x="8732520" y="4261104"/>
+            <a:ext cx="2414016" cy="420624"/>
           </a:xfrm>
           <a:prstGeom prst="roundRect">
             <a:avLst>
@@ -3638,8 +3638,8 @@
         </p:nvSpPr>
         <p:spPr>
           <a:xfrm>
-            <a:off x="8567928" y="4261104"/>
-            <a:ext cx="2221992" cy="420624"/>
+            <a:off x="8787384" y="4261104"/>
+            <a:ext cx="2304288" cy="420624"/>
           </a:xfrm>
           <a:prstGeom prst="rect">
             <a:avLst/>
@@ -3677,7 +3677,7 @@
         </p:nvSpPr>
         <p:spPr>
           <a:xfrm>
-            <a:off x="1051560" y="5349240"/>
+            <a:off x="1051560" y="5285232"/>
             <a:ext cx="10058400" cy="329184"/>
           </a:xfrm>
           <a:prstGeom prst="rect">
@@ -3694,7 +3694,7 @@
               <a:buNone/>
             </a:pPr>
             <a:r>
-              <a:rPr lang="en-US" sz="1600" dirty="0">
+              <a:rPr lang="en-US" sz="1700" dirty="0">
                 <a:solidFill>
                   <a:srgbClr val="5B6470"/>
                 </a:solidFill>
@@ -3702,15 +3702,96 @@
                 <a:ea typeface="PingFang TC" pitchFamily="34" charset="-122"/>
                 <a:cs typeface="PingFang TC" pitchFamily="34" charset="-120"/>
               </a:rPr>
-              <a:t>報告人：＿＿＿＿＿　·　指導教授：呂＿＿　·　2026 年 8 月</a:t>
-            </a:r>
-            <a:endParaRPr lang="en-US" sz="1600" dirty="0"/>
+              <a:t>報告人　</a:t>
+            </a:r>
+            <a:pPr indent="0" marL="0">
+              <a:buNone/>
+            </a:pPr>
+            <a:r>
+              <a:rPr lang="en-US" sz="1700" b="1" dirty="0">
+                <a:solidFill>
+                  <a:srgbClr val="13212A"/>
+                </a:solidFill>
+                <a:latin typeface="PingFang TC" pitchFamily="34" charset="0"/>
+                <a:ea typeface="PingFang TC" pitchFamily="34" charset="-122"/>
+                <a:cs typeface="PingFang TC" pitchFamily="34" charset="-120"/>
+              </a:rPr>
+              <a:t>吳晉緯　·　沈威廷</a:t>
+            </a:r>
+            <a:pPr indent="0" marL="0">
+              <a:buNone/>
+            </a:pPr>
+            <a:r>
+              <a:rPr lang="en-US" sz="1700" dirty="0">
+                <a:solidFill>
+                  <a:srgbClr val="5B6470"/>
+                </a:solidFill>
+                <a:latin typeface="PingFang TC" pitchFamily="34" charset="0"/>
+                <a:ea typeface="PingFang TC" pitchFamily="34" charset="-122"/>
+                <a:cs typeface="PingFang TC" pitchFamily="34" charset="-120"/>
+              </a:rPr>
+              <a:t>　　　指導教授　</a:t>
+            </a:r>
+            <a:pPr indent="0" marL="0">
+              <a:buNone/>
+            </a:pPr>
+            <a:r>
+              <a:rPr lang="en-US" sz="1700" b="1" dirty="0">
+                <a:solidFill>
+                  <a:srgbClr val="13212A"/>
+                </a:solidFill>
+                <a:latin typeface="PingFang TC" pitchFamily="34" charset="0"/>
+                <a:ea typeface="PingFang TC" pitchFamily="34" charset="-122"/>
+                <a:cs typeface="PingFang TC" pitchFamily="34" charset="-120"/>
+              </a:rPr>
+              <a:t>呂政修 教授</a:t>
+            </a:r>
+            <a:endParaRPr lang="en-US" sz="1700" dirty="0"/>
           </a:p>
         </p:txBody>
       </p:sp>
       <p:sp>
         <p:nvSpPr>
           <p:cNvPr id="18" name="Text 16"/>
+          <p:cNvSpPr/>
+          <p:nvPr/>
+        </p:nvSpPr>
+        <p:spPr>
+          <a:xfrm>
+            <a:off x="1051560" y="5669280"/>
+            <a:ext cx="10058400" cy="292608"/>
+          </a:xfrm>
+          <a:prstGeom prst="rect">
+            <a:avLst/>
+          </a:prstGeom>
+          <a:noFill/>
+          <a:ln/>
+        </p:spPr>
+        <p:txBody>
+          <a:bodyPr wrap="square" rtlCol="0" anchor="ctr"/>
+          <a:lstStyle/>
+          <a:p>
+            <a:pPr indent="0" marL="0">
+              <a:buNone/>
+            </a:pPr>
+            <a:r>
+              <a:rPr lang="en-US" sz="1500" dirty="0">
+                <a:solidFill>
+                  <a:srgbClr val="5B6470"/>
+                </a:solidFill>
+                <a:latin typeface="PingFang TC" pitchFamily="34" charset="0"/>
+                <a:ea typeface="PingFang TC" pitchFamily="34" charset="-122"/>
+                <a:cs typeface="PingFang TC" pitchFamily="34" charset="-120"/>
+              </a:rPr>
+              <a:t>國立臺灣科技大學　·　2026 年 8 月</a:t>
+            </a:r>
+            <a:endParaRPr lang="en-US" sz="1500" dirty="0"/>
+          </a:p>
+        </p:txBody>
+      </p:sp>
+      <p:sp>
+        <p:nvSpPr>
+          <p:cNvPr id="19" name="Text 17"/>
           <p:cNvSpPr/>
           <p:nvPr/>
         </p:nvSpPr>

--- a/doc/ppt/CloudDrive_專題報告_v3.0.pptx
+++ b/doc/ppt/CloudDrive_專題報告_v3.0.pptx
@@ -17567,7 +17567,7 @@
         <p:spPr>
           <a:xfrm>
             <a:off x="566928" y="1572768"/>
-            <a:ext cx="3541776" cy="4069080"/>
+            <a:ext cx="3541776" cy="4224528"/>
           </a:xfrm>
           <a:prstGeom prst="roundRect">
             <a:avLst>
@@ -17713,7 +17713,46 @@
         </p:nvSpPr>
         <p:spPr>
           <a:xfrm>
-            <a:off x="768096" y="2377440"/>
+            <a:off x="768096" y="2194560"/>
+            <a:ext cx="3139440" cy="274320"/>
+          </a:xfrm>
+          <a:prstGeom prst="rect">
+            <a:avLst/>
+          </a:prstGeom>
+          <a:noFill/>
+          <a:ln/>
+        </p:spPr>
+        <p:txBody>
+          <a:bodyPr wrap="square" rtlCol="0" anchor="ctr"/>
+          <a:lstStyle/>
+          <a:p>
+            <a:pPr indent="0" marL="0">
+              <a:buNone/>
+            </a:pPr>
+            <a:r>
+              <a:rPr lang="en-US" sz="1500" dirty="0">
+                <a:solidFill>
+                  <a:srgbClr val="2F6F8F"/>
+                </a:solidFill>
+                <a:latin typeface="PingFang TC" pitchFamily="34" charset="0"/>
+                <a:ea typeface="PingFang TC" pitchFamily="34" charset="-122"/>
+                <a:cs typeface="PingFang TC" pitchFamily="34" charset="-120"/>
+              </a:rPr>
+              <a:t>報告　吳晉緯</a:t>
+            </a:r>
+            <a:endParaRPr lang="en-US" sz="1500" dirty="0"/>
+          </a:p>
+        </p:txBody>
+      </p:sp>
+      <p:sp>
+        <p:nvSpPr>
+          <p:cNvPr id="13" name="Text 11"/>
+          <p:cNvSpPr/>
+          <p:nvPr/>
+        </p:nvSpPr>
+        <p:spPr>
+          <a:xfrm>
+            <a:off x="768096" y="2542032"/>
             <a:ext cx="292608" cy="274320"/>
           </a:xfrm>
           <a:prstGeom prst="rect">
@@ -17746,13 +17785,13 @@
       </p:sp>
       <p:sp>
         <p:nvSpPr>
-          <p:cNvPr id="13" name="Text 11"/>
-          <p:cNvSpPr/>
-          <p:nvPr/>
-        </p:nvSpPr>
-        <p:spPr>
-          <a:xfrm>
-            <a:off x="1078992" y="2377440"/>
+          <p:cNvPr id="14" name="Text 12"/>
+          <p:cNvSpPr/>
+          <p:nvPr/>
+        </p:nvSpPr>
+        <p:spPr>
+          <a:xfrm>
+            <a:off x="1078992" y="2542032"/>
             <a:ext cx="1987296" cy="274320"/>
           </a:xfrm>
           <a:prstGeom prst="rect">
@@ -17785,13 +17824,13 @@
       </p:sp>
       <p:sp>
         <p:nvSpPr>
-          <p:cNvPr id="14" name="Text 12"/>
-          <p:cNvSpPr/>
-          <p:nvPr/>
-        </p:nvSpPr>
-        <p:spPr>
-          <a:xfrm>
-            <a:off x="3029712" y="2377440"/>
+          <p:cNvPr id="15" name="Text 13"/>
+          <p:cNvSpPr/>
+          <p:nvPr/>
+        </p:nvSpPr>
+        <p:spPr>
+          <a:xfrm>
+            <a:off x="3029712" y="2542032"/>
             <a:ext cx="877824" cy="274320"/>
           </a:xfrm>
           <a:prstGeom prst="rect">
@@ -17824,13 +17863,13 @@
       </p:sp>
       <p:sp>
         <p:nvSpPr>
-          <p:cNvPr id="15" name="Text 13"/>
-          <p:cNvSpPr/>
-          <p:nvPr/>
-        </p:nvSpPr>
-        <p:spPr>
-          <a:xfrm>
-            <a:off x="1078992" y="2651760"/>
+          <p:cNvPr id="16" name="Text 14"/>
+          <p:cNvSpPr/>
+          <p:nvPr/>
+        </p:nvSpPr>
+        <p:spPr>
+          <a:xfrm>
+            <a:off x="1078992" y="2816352"/>
             <a:ext cx="2828544" cy="310896"/>
           </a:xfrm>
           <a:prstGeom prst="rect">
@@ -17863,13 +17902,13 @@
       </p:sp>
       <p:sp>
         <p:nvSpPr>
-          <p:cNvPr id="16" name="Text 14"/>
-          <p:cNvSpPr/>
-          <p:nvPr/>
-        </p:nvSpPr>
-        <p:spPr>
-          <a:xfrm>
-            <a:off x="768096" y="3163824"/>
+          <p:cNvPr id="17" name="Text 15"/>
+          <p:cNvSpPr/>
+          <p:nvPr/>
+        </p:nvSpPr>
+        <p:spPr>
+          <a:xfrm>
+            <a:off x="768096" y="3328416"/>
             <a:ext cx="292608" cy="274320"/>
           </a:xfrm>
           <a:prstGeom prst="rect">
@@ -17902,13 +17941,13 @@
       </p:sp>
       <p:sp>
         <p:nvSpPr>
-          <p:cNvPr id="17" name="Text 15"/>
-          <p:cNvSpPr/>
-          <p:nvPr/>
-        </p:nvSpPr>
-        <p:spPr>
-          <a:xfrm>
-            <a:off x="1078992" y="3163824"/>
+          <p:cNvPr id="18" name="Text 16"/>
+          <p:cNvSpPr/>
+          <p:nvPr/>
+        </p:nvSpPr>
+        <p:spPr>
+          <a:xfrm>
+            <a:off x="1078992" y="3328416"/>
             <a:ext cx="1987296" cy="274320"/>
           </a:xfrm>
           <a:prstGeom prst="rect">
@@ -17941,13 +17980,13 @@
       </p:sp>
       <p:sp>
         <p:nvSpPr>
-          <p:cNvPr id="18" name="Text 16"/>
-          <p:cNvSpPr/>
-          <p:nvPr/>
-        </p:nvSpPr>
-        <p:spPr>
-          <a:xfrm>
-            <a:off x="3029712" y="3163824"/>
+          <p:cNvPr id="19" name="Text 17"/>
+          <p:cNvSpPr/>
+          <p:nvPr/>
+        </p:nvSpPr>
+        <p:spPr>
+          <a:xfrm>
+            <a:off x="3029712" y="3328416"/>
             <a:ext cx="877824" cy="274320"/>
           </a:xfrm>
           <a:prstGeom prst="rect">
@@ -17980,13 +18019,13 @@
       </p:sp>
       <p:sp>
         <p:nvSpPr>
-          <p:cNvPr id="19" name="Text 17"/>
-          <p:cNvSpPr/>
-          <p:nvPr/>
-        </p:nvSpPr>
-        <p:spPr>
-          <a:xfrm>
-            <a:off x="1078992" y="3438144"/>
+          <p:cNvPr id="20" name="Text 18"/>
+          <p:cNvSpPr/>
+          <p:nvPr/>
+        </p:nvSpPr>
+        <p:spPr>
+          <a:xfrm>
+            <a:off x="1078992" y="3602736"/>
             <a:ext cx="2828544" cy="310896"/>
           </a:xfrm>
           <a:prstGeom prst="rect">
@@ -18019,14 +18058,14 @@
       </p:sp>
       <p:sp>
         <p:nvSpPr>
-          <p:cNvPr id="20" name="Shape 18"/>
+          <p:cNvPr id="21" name="Shape 19"/>
           <p:cNvSpPr/>
           <p:nvPr/>
         </p:nvSpPr>
         <p:spPr>
           <a:xfrm>
             <a:off x="4309872" y="1572768"/>
-            <a:ext cx="3541776" cy="4069080"/>
+            <a:ext cx="3541776" cy="4224528"/>
           </a:xfrm>
           <a:prstGeom prst="roundRect">
             <a:avLst>
@@ -18046,7 +18085,7 @@
       </p:sp>
       <p:sp>
         <p:nvSpPr>
-          <p:cNvPr id="21" name="Shape 19"/>
+          <p:cNvPr id="22" name="Shape 20"/>
           <p:cNvSpPr/>
           <p:nvPr/>
         </p:nvSpPr>
@@ -18066,7 +18105,7 @@
       </p:sp>
       <p:sp>
         <p:nvSpPr>
-          <p:cNvPr id="22" name="Shape 20"/>
+          <p:cNvPr id="23" name="Shape 21"/>
           <p:cNvSpPr/>
           <p:nvPr/>
         </p:nvSpPr>
@@ -18088,7 +18127,7 @@
       </p:sp>
       <p:sp>
         <p:nvSpPr>
-          <p:cNvPr id="23" name="Text 21"/>
+          <p:cNvPr id="24" name="Text 22"/>
           <p:cNvSpPr/>
           <p:nvPr/>
         </p:nvSpPr>
@@ -18127,7 +18166,7 @@
       </p:sp>
       <p:sp>
         <p:nvSpPr>
-          <p:cNvPr id="24" name="Text 22"/>
+          <p:cNvPr id="25" name="Text 23"/>
           <p:cNvSpPr/>
           <p:nvPr/>
         </p:nvSpPr>
@@ -18166,13 +18205,52 @@
       </p:sp>
       <p:sp>
         <p:nvSpPr>
-          <p:cNvPr id="25" name="Text 23"/>
-          <p:cNvSpPr/>
-          <p:nvPr/>
-        </p:nvSpPr>
-        <p:spPr>
-          <a:xfrm>
-            <a:off x="4511040" y="2377440"/>
+          <p:cNvPr id="26" name="Text 24"/>
+          <p:cNvSpPr/>
+          <p:nvPr/>
+        </p:nvSpPr>
+        <p:spPr>
+          <a:xfrm>
+            <a:off x="4511040" y="2194560"/>
+            <a:ext cx="3139440" cy="274320"/>
+          </a:xfrm>
+          <a:prstGeom prst="rect">
+            <a:avLst/>
+          </a:prstGeom>
+          <a:noFill/>
+          <a:ln/>
+        </p:spPr>
+        <p:txBody>
+          <a:bodyPr wrap="square" rtlCol="0" anchor="ctr"/>
+          <a:lstStyle/>
+          <a:p>
+            <a:pPr indent="0" marL="0">
+              <a:buNone/>
+            </a:pPr>
+            <a:r>
+              <a:rPr lang="en-US" sz="1500" dirty="0">
+                <a:solidFill>
+                  <a:srgbClr val="7E6DA8"/>
+                </a:solidFill>
+                <a:latin typeface="PingFang TC" pitchFamily="34" charset="0"/>
+                <a:ea typeface="PingFang TC" pitchFamily="34" charset="-122"/>
+                <a:cs typeface="PingFang TC" pitchFamily="34" charset="-120"/>
+              </a:rPr>
+              <a:t>報告　沈威廷</a:t>
+            </a:r>
+            <a:endParaRPr lang="en-US" sz="1500" dirty="0"/>
+          </a:p>
+        </p:txBody>
+      </p:sp>
+      <p:sp>
+        <p:nvSpPr>
+          <p:cNvPr id="27" name="Text 25"/>
+          <p:cNvSpPr/>
+          <p:nvPr/>
+        </p:nvSpPr>
+        <p:spPr>
+          <a:xfrm>
+            <a:off x="4511040" y="2542032"/>
             <a:ext cx="292608" cy="274320"/>
           </a:xfrm>
           <a:prstGeom prst="rect">
@@ -18205,13 +18283,13 @@
       </p:sp>
       <p:sp>
         <p:nvSpPr>
-          <p:cNvPr id="26" name="Text 24"/>
-          <p:cNvSpPr/>
-          <p:nvPr/>
-        </p:nvSpPr>
-        <p:spPr>
-          <a:xfrm>
-            <a:off x="4821936" y="2377440"/>
+          <p:cNvPr id="28" name="Text 26"/>
+          <p:cNvSpPr/>
+          <p:nvPr/>
+        </p:nvSpPr>
+        <p:spPr>
+          <a:xfrm>
+            <a:off x="4821936" y="2542032"/>
             <a:ext cx="1987296" cy="274320"/>
           </a:xfrm>
           <a:prstGeom prst="rect">
@@ -18244,13 +18322,13 @@
       </p:sp>
       <p:sp>
         <p:nvSpPr>
-          <p:cNvPr id="27" name="Text 25"/>
-          <p:cNvSpPr/>
-          <p:nvPr/>
-        </p:nvSpPr>
-        <p:spPr>
-          <a:xfrm>
-            <a:off x="6772656" y="2377440"/>
+          <p:cNvPr id="29" name="Text 27"/>
+          <p:cNvSpPr/>
+          <p:nvPr/>
+        </p:nvSpPr>
+        <p:spPr>
+          <a:xfrm>
+            <a:off x="6772656" y="2542032"/>
             <a:ext cx="877824" cy="274320"/>
           </a:xfrm>
           <a:prstGeom prst="rect">
@@ -18283,13 +18361,13 @@
       </p:sp>
       <p:sp>
         <p:nvSpPr>
-          <p:cNvPr id="28" name="Text 26"/>
-          <p:cNvSpPr/>
-          <p:nvPr/>
-        </p:nvSpPr>
-        <p:spPr>
-          <a:xfrm>
-            <a:off x="4821936" y="2651760"/>
+          <p:cNvPr id="30" name="Text 28"/>
+          <p:cNvSpPr/>
+          <p:nvPr/>
+        </p:nvSpPr>
+        <p:spPr>
+          <a:xfrm>
+            <a:off x="4821936" y="2816352"/>
             <a:ext cx="2828544" cy="310896"/>
           </a:xfrm>
           <a:prstGeom prst="rect">
@@ -18322,13 +18400,13 @@
       </p:sp>
       <p:sp>
         <p:nvSpPr>
-          <p:cNvPr id="29" name="Text 27"/>
-          <p:cNvSpPr/>
-          <p:nvPr/>
-        </p:nvSpPr>
-        <p:spPr>
-          <a:xfrm>
-            <a:off x="4511040" y="3163824"/>
+          <p:cNvPr id="31" name="Text 29"/>
+          <p:cNvSpPr/>
+          <p:nvPr/>
+        </p:nvSpPr>
+        <p:spPr>
+          <a:xfrm>
+            <a:off x="4511040" y="3328416"/>
             <a:ext cx="292608" cy="274320"/>
           </a:xfrm>
           <a:prstGeom prst="rect">
@@ -18361,13 +18439,13 @@
       </p:sp>
       <p:sp>
         <p:nvSpPr>
-          <p:cNvPr id="30" name="Text 28"/>
-          <p:cNvSpPr/>
-          <p:nvPr/>
-        </p:nvSpPr>
-        <p:spPr>
-          <a:xfrm>
-            <a:off x="4821936" y="3163824"/>
+          <p:cNvPr id="32" name="Text 30"/>
+          <p:cNvSpPr/>
+          <p:nvPr/>
+        </p:nvSpPr>
+        <p:spPr>
+          <a:xfrm>
+            <a:off x="4821936" y="3328416"/>
             <a:ext cx="1987296" cy="274320"/>
           </a:xfrm>
           <a:prstGeom prst="rect">
@@ -18400,13 +18478,13 @@
       </p:sp>
       <p:sp>
         <p:nvSpPr>
-          <p:cNvPr id="31" name="Text 29"/>
-          <p:cNvSpPr/>
-          <p:nvPr/>
-        </p:nvSpPr>
-        <p:spPr>
-          <a:xfrm>
-            <a:off x="6772656" y="3163824"/>
+          <p:cNvPr id="33" name="Text 31"/>
+          <p:cNvSpPr/>
+          <p:nvPr/>
+        </p:nvSpPr>
+        <p:spPr>
+          <a:xfrm>
+            <a:off x="6772656" y="3328416"/>
             <a:ext cx="877824" cy="274320"/>
           </a:xfrm>
           <a:prstGeom prst="rect">
@@ -18439,13 +18517,13 @@
       </p:sp>
       <p:sp>
         <p:nvSpPr>
-          <p:cNvPr id="32" name="Text 30"/>
-          <p:cNvSpPr/>
-          <p:nvPr/>
-        </p:nvSpPr>
-        <p:spPr>
-          <a:xfrm>
-            <a:off x="4821936" y="3438144"/>
+          <p:cNvPr id="34" name="Text 32"/>
+          <p:cNvSpPr/>
+          <p:nvPr/>
+        </p:nvSpPr>
+        <p:spPr>
+          <a:xfrm>
+            <a:off x="4821936" y="3602736"/>
             <a:ext cx="2828544" cy="310896"/>
           </a:xfrm>
           <a:prstGeom prst="rect">
@@ -18478,14 +18556,14 @@
       </p:sp>
       <p:sp>
         <p:nvSpPr>
-          <p:cNvPr id="33" name="Shape 31"/>
+          <p:cNvPr id="35" name="Shape 33"/>
           <p:cNvSpPr/>
           <p:nvPr/>
         </p:nvSpPr>
         <p:spPr>
           <a:xfrm>
             <a:off x="8052816" y="1572768"/>
-            <a:ext cx="3541776" cy="4069080"/>
+            <a:ext cx="3541776" cy="4224528"/>
           </a:xfrm>
           <a:prstGeom prst="roundRect">
             <a:avLst>
@@ -18505,7 +18583,7 @@
       </p:sp>
       <p:sp>
         <p:nvSpPr>
-          <p:cNvPr id="34" name="Shape 32"/>
+          <p:cNvPr id="36" name="Shape 34"/>
           <p:cNvSpPr/>
           <p:nvPr/>
         </p:nvSpPr>
@@ -18525,7 +18603,7 @@
       </p:sp>
       <p:sp>
         <p:nvSpPr>
-          <p:cNvPr id="35" name="Shape 33"/>
+          <p:cNvPr id="37" name="Shape 35"/>
           <p:cNvSpPr/>
           <p:nvPr/>
         </p:nvSpPr>
@@ -18547,7 +18625,7 @@
       </p:sp>
       <p:sp>
         <p:nvSpPr>
-          <p:cNvPr id="36" name="Text 34"/>
+          <p:cNvPr id="38" name="Text 36"/>
           <p:cNvSpPr/>
           <p:nvPr/>
         </p:nvSpPr>
@@ -18586,7 +18664,7 @@
       </p:sp>
       <p:sp>
         <p:nvSpPr>
-          <p:cNvPr id="37" name="Text 35"/>
+          <p:cNvPr id="39" name="Text 37"/>
           <p:cNvSpPr/>
           <p:nvPr/>
         </p:nvSpPr>
@@ -18625,13 +18703,52 @@
       </p:sp>
       <p:sp>
         <p:nvSpPr>
-          <p:cNvPr id="38" name="Text 36"/>
-          <p:cNvSpPr/>
-          <p:nvPr/>
-        </p:nvSpPr>
-        <p:spPr>
-          <a:xfrm>
-            <a:off x="8253984" y="2377440"/>
+          <p:cNvPr id="40" name="Text 38"/>
+          <p:cNvSpPr/>
+          <p:nvPr/>
+        </p:nvSpPr>
+        <p:spPr>
+          <a:xfrm>
+            <a:off x="8253984" y="2194560"/>
+            <a:ext cx="3139440" cy="274320"/>
+          </a:xfrm>
+          <a:prstGeom prst="rect">
+            <a:avLst/>
+          </a:prstGeom>
+          <a:noFill/>
+          <a:ln/>
+        </p:spPr>
+        <p:txBody>
+          <a:bodyPr wrap="square" rtlCol="0" anchor="ctr"/>
+          <a:lstStyle/>
+          <a:p>
+            <a:pPr indent="0" marL="0">
+              <a:buNone/>
+            </a:pPr>
+            <a:r>
+              <a:rPr lang="en-US" sz="1500" dirty="0">
+                <a:solidFill>
+                  <a:srgbClr val="C9A94E"/>
+                </a:solidFill>
+                <a:latin typeface="PingFang TC" pitchFamily="34" charset="0"/>
+                <a:ea typeface="PingFang TC" pitchFamily="34" charset="-122"/>
+                <a:cs typeface="PingFang TC" pitchFamily="34" charset="-120"/>
+              </a:rPr>
+              <a:t>報告　吳晉緯</a:t>
+            </a:r>
+            <a:endParaRPr lang="en-US" sz="1500" dirty="0"/>
+          </a:p>
+        </p:txBody>
+      </p:sp>
+      <p:sp>
+        <p:nvSpPr>
+          <p:cNvPr id="41" name="Text 39"/>
+          <p:cNvSpPr/>
+          <p:nvPr/>
+        </p:nvSpPr>
+        <p:spPr>
+          <a:xfrm>
+            <a:off x="8253984" y="2542032"/>
             <a:ext cx="292608" cy="274320"/>
           </a:xfrm>
           <a:prstGeom prst="rect">
@@ -18664,13 +18781,13 @@
       </p:sp>
       <p:sp>
         <p:nvSpPr>
-          <p:cNvPr id="39" name="Text 37"/>
-          <p:cNvSpPr/>
-          <p:nvPr/>
-        </p:nvSpPr>
-        <p:spPr>
-          <a:xfrm>
-            <a:off x="8564880" y="2377440"/>
+          <p:cNvPr id="42" name="Text 40"/>
+          <p:cNvSpPr/>
+          <p:nvPr/>
+        </p:nvSpPr>
+        <p:spPr>
+          <a:xfrm>
+            <a:off x="8564880" y="2542032"/>
             <a:ext cx="1987296" cy="274320"/>
           </a:xfrm>
           <a:prstGeom prst="rect">
@@ -18703,13 +18820,13 @@
       </p:sp>
       <p:sp>
         <p:nvSpPr>
-          <p:cNvPr id="40" name="Text 38"/>
-          <p:cNvSpPr/>
-          <p:nvPr/>
-        </p:nvSpPr>
-        <p:spPr>
-          <a:xfrm>
-            <a:off x="10515600" y="2377440"/>
+          <p:cNvPr id="43" name="Text 41"/>
+          <p:cNvSpPr/>
+          <p:nvPr/>
+        </p:nvSpPr>
+        <p:spPr>
+          <a:xfrm>
+            <a:off x="10515600" y="2542032"/>
             <a:ext cx="877824" cy="274320"/>
           </a:xfrm>
           <a:prstGeom prst="rect">
@@ -18742,13 +18859,13 @@
       </p:sp>
       <p:sp>
         <p:nvSpPr>
-          <p:cNvPr id="41" name="Text 39"/>
-          <p:cNvSpPr/>
-          <p:nvPr/>
-        </p:nvSpPr>
-        <p:spPr>
-          <a:xfrm>
-            <a:off x="8564880" y="2651760"/>
+          <p:cNvPr id="44" name="Text 42"/>
+          <p:cNvSpPr/>
+          <p:nvPr/>
+        </p:nvSpPr>
+        <p:spPr>
+          <a:xfrm>
+            <a:off x="8564880" y="2816352"/>
             <a:ext cx="2828544" cy="310896"/>
           </a:xfrm>
           <a:prstGeom prst="rect">
@@ -18773,7 +18890,7 @@
                 <a:ea typeface="PingFang TC" pitchFamily="34" charset="-122"/>
                 <a:cs typeface="PingFang TC" pitchFamily="34" charset="-120"/>
               </a:rPr>
-              <a:t>四節點 · Docker/CI-CD · 環境差異 · 實戰</a:t>
+              <a:t>四節點 · CI-CD · 環境與實戰</a:t>
             </a:r>
             <a:endParaRPr lang="en-US" sz="1500" dirty="0"/>
           </a:p>
@@ -18781,13 +18898,13 @@
       </p:sp>
       <p:sp>
         <p:nvSpPr>
-          <p:cNvPr id="42" name="Text 40"/>
-          <p:cNvSpPr/>
-          <p:nvPr/>
-        </p:nvSpPr>
-        <p:spPr>
-          <a:xfrm>
-            <a:off x="8253984" y="3163824"/>
+          <p:cNvPr id="45" name="Text 43"/>
+          <p:cNvSpPr/>
+          <p:nvPr/>
+        </p:nvSpPr>
+        <p:spPr>
+          <a:xfrm>
+            <a:off x="8253984" y="3328416"/>
             <a:ext cx="292608" cy="274320"/>
           </a:xfrm>
           <a:prstGeom prst="rect">
@@ -18820,13 +18937,13 @@
       </p:sp>
       <p:sp>
         <p:nvSpPr>
-          <p:cNvPr id="43" name="Text 41"/>
-          <p:cNvSpPr/>
-          <p:nvPr/>
-        </p:nvSpPr>
-        <p:spPr>
-          <a:xfrm>
-            <a:off x="8564880" y="3163824"/>
+          <p:cNvPr id="46" name="Text 44"/>
+          <p:cNvSpPr/>
+          <p:nvPr/>
+        </p:nvSpPr>
+        <p:spPr>
+          <a:xfrm>
+            <a:off x="8564880" y="3328416"/>
             <a:ext cx="1987296" cy="274320"/>
           </a:xfrm>
           <a:prstGeom prst="rect">
@@ -18859,13 +18976,13 @@
       </p:sp>
       <p:sp>
         <p:nvSpPr>
-          <p:cNvPr id="44" name="Text 42"/>
-          <p:cNvSpPr/>
-          <p:nvPr/>
-        </p:nvSpPr>
-        <p:spPr>
-          <a:xfrm>
-            <a:off x="10515600" y="3163824"/>
+          <p:cNvPr id="47" name="Text 45"/>
+          <p:cNvSpPr/>
+          <p:nvPr/>
+        </p:nvSpPr>
+        <p:spPr>
+          <a:xfrm>
+            <a:off x="10515600" y="3328416"/>
             <a:ext cx="877824" cy="274320"/>
           </a:xfrm>
           <a:prstGeom prst="rect">
@@ -18898,13 +19015,13 @@
       </p:sp>
       <p:sp>
         <p:nvSpPr>
-          <p:cNvPr id="45" name="Text 43"/>
-          <p:cNvSpPr/>
-          <p:nvPr/>
-        </p:nvSpPr>
-        <p:spPr>
-          <a:xfrm>
-            <a:off x="8564880" y="3438144"/>
+          <p:cNvPr id="48" name="Text 46"/>
+          <p:cNvSpPr/>
+          <p:nvPr/>
+        </p:nvSpPr>
+        <p:spPr>
+          <a:xfrm>
+            <a:off x="8564880" y="3602736"/>
             <a:ext cx="2828544" cy="310896"/>
           </a:xfrm>
           <a:prstGeom prst="rect">
@@ -18937,13 +19054,13 @@
       </p:sp>
       <p:sp>
         <p:nvSpPr>
-          <p:cNvPr id="46" name="Text 44"/>
-          <p:cNvSpPr/>
-          <p:nvPr/>
-        </p:nvSpPr>
-        <p:spPr>
-          <a:xfrm>
-            <a:off x="8253984" y="3950208"/>
+          <p:cNvPr id="49" name="Text 47"/>
+          <p:cNvSpPr/>
+          <p:nvPr/>
+        </p:nvSpPr>
+        <p:spPr>
+          <a:xfrm>
+            <a:off x="8253984" y="4114800"/>
             <a:ext cx="292608" cy="274320"/>
           </a:xfrm>
           <a:prstGeom prst="rect">
@@ -18976,13 +19093,13 @@
       </p:sp>
       <p:sp>
         <p:nvSpPr>
-          <p:cNvPr id="47" name="Text 45"/>
-          <p:cNvSpPr/>
-          <p:nvPr/>
-        </p:nvSpPr>
-        <p:spPr>
-          <a:xfrm>
-            <a:off x="8564880" y="3950208"/>
+          <p:cNvPr id="50" name="Text 48"/>
+          <p:cNvSpPr/>
+          <p:nvPr/>
+        </p:nvSpPr>
+        <p:spPr>
+          <a:xfrm>
+            <a:off x="8564880" y="4114800"/>
             <a:ext cx="1987296" cy="274320"/>
           </a:xfrm>
           <a:prstGeom prst="rect">
@@ -19015,13 +19132,13 @@
       </p:sp>
       <p:sp>
         <p:nvSpPr>
-          <p:cNvPr id="48" name="Text 46"/>
-          <p:cNvSpPr/>
-          <p:nvPr/>
-        </p:nvSpPr>
-        <p:spPr>
-          <a:xfrm>
-            <a:off x="10515600" y="3950208"/>
+          <p:cNvPr id="51" name="Text 49"/>
+          <p:cNvSpPr/>
+          <p:nvPr/>
+        </p:nvSpPr>
+        <p:spPr>
+          <a:xfrm>
+            <a:off x="10515600" y="4114800"/>
             <a:ext cx="877824" cy="274320"/>
           </a:xfrm>
           <a:prstGeom prst="rect">
@@ -19054,13 +19171,13 @@
       </p:sp>
       <p:sp>
         <p:nvSpPr>
-          <p:cNvPr id="49" name="Text 47"/>
-          <p:cNvSpPr/>
-          <p:nvPr/>
-        </p:nvSpPr>
-        <p:spPr>
-          <a:xfrm>
-            <a:off x="8564880" y="4224528"/>
+          <p:cNvPr id="52" name="Text 50"/>
+          <p:cNvSpPr/>
+          <p:nvPr/>
+        </p:nvSpPr>
+        <p:spPr>
+          <a:xfrm>
+            <a:off x="8564880" y="4389120"/>
             <a:ext cx="2828544" cy="310896"/>
           </a:xfrm>
           <a:prstGeom prst="rect">
@@ -19093,13 +19210,13 @@
       </p:sp>
       <p:sp>
         <p:nvSpPr>
-          <p:cNvPr id="50" name="Text 48"/>
-          <p:cNvSpPr/>
-          <p:nvPr/>
-        </p:nvSpPr>
-        <p:spPr>
-          <a:xfrm>
-            <a:off x="8253984" y="4736592"/>
+          <p:cNvPr id="53" name="Text 51"/>
+          <p:cNvSpPr/>
+          <p:nvPr/>
+        </p:nvSpPr>
+        <p:spPr>
+          <a:xfrm>
+            <a:off x="8253984" y="4901184"/>
             <a:ext cx="292608" cy="274320"/>
           </a:xfrm>
           <a:prstGeom prst="rect">
@@ -19132,13 +19249,13 @@
       </p:sp>
       <p:sp>
         <p:nvSpPr>
-          <p:cNvPr id="51" name="Text 49"/>
-          <p:cNvSpPr/>
-          <p:nvPr/>
-        </p:nvSpPr>
-        <p:spPr>
-          <a:xfrm>
-            <a:off x="8564880" y="4736592"/>
+          <p:cNvPr id="54" name="Text 52"/>
+          <p:cNvSpPr/>
+          <p:nvPr/>
+        </p:nvSpPr>
+        <p:spPr>
+          <a:xfrm>
+            <a:off x="8564880" y="4901184"/>
             <a:ext cx="1987296" cy="274320"/>
           </a:xfrm>
           <a:prstGeom prst="rect">
@@ -19171,13 +19288,13 @@
       </p:sp>
       <p:sp>
         <p:nvSpPr>
-          <p:cNvPr id="52" name="Text 50"/>
-          <p:cNvSpPr/>
-          <p:nvPr/>
-        </p:nvSpPr>
-        <p:spPr>
-          <a:xfrm>
-            <a:off x="10515600" y="4736592"/>
+          <p:cNvPr id="55" name="Text 53"/>
+          <p:cNvSpPr/>
+          <p:nvPr/>
+        </p:nvSpPr>
+        <p:spPr>
+          <a:xfrm>
+            <a:off x="10515600" y="4901184"/>
             <a:ext cx="877824" cy="274320"/>
           </a:xfrm>
           <a:prstGeom prst="rect">
@@ -19210,13 +19327,13 @@
       </p:sp>
       <p:sp>
         <p:nvSpPr>
-          <p:cNvPr id="53" name="Text 51"/>
-          <p:cNvSpPr/>
-          <p:nvPr/>
-        </p:nvSpPr>
-        <p:spPr>
-          <a:xfrm>
-            <a:off x="8564880" y="5010912"/>
+          <p:cNvPr id="56" name="Text 54"/>
+          <p:cNvSpPr/>
+          <p:nvPr/>
+        </p:nvSpPr>
+        <p:spPr>
+          <a:xfrm>
+            <a:off x="8564880" y="5175504"/>
             <a:ext cx="2828544" cy="310896"/>
           </a:xfrm>
           <a:prstGeom prst="rect">
@@ -19249,7 +19366,7 @@
       </p:sp>
       <p:sp>
         <p:nvSpPr>
-          <p:cNvPr id="54" name="Shape 52"/>
+          <p:cNvPr id="57" name="Shape 55"/>
           <p:cNvSpPr/>
           <p:nvPr/>
         </p:nvSpPr>
@@ -19276,7 +19393,7 @@
       </p:sp>
       <p:sp>
         <p:nvSpPr>
-          <p:cNvPr id="55" name="Text 53"/>
+          <p:cNvPr id="58" name="Text 56"/>
           <p:cNvSpPr/>
           <p:nvPr/>
         </p:nvSpPr>

--- a/doc/ppt/CloudDrive_專題報告_v3.0.pptx
+++ b/doc/ppt/CloudDrive_專題報告_v3.0.pptx
@@ -19085,7 +19085,7 @@
                 <a:ea typeface="Georgia" pitchFamily="34" charset="-122"/>
                 <a:cs typeface="Georgia" pitchFamily="34" charset="-120"/>
               </a:rPr>
-              <a:t>V</a:t>
+              <a:t>G</a:t>
             </a:r>
             <a:endParaRPr lang="en-US" sz="1500" dirty="0"/>
           </a:p>
@@ -19241,7 +19241,7 @@
                 <a:ea typeface="Georgia" pitchFamily="34" charset="-122"/>
                 <a:cs typeface="Georgia" pitchFamily="34" charset="-120"/>
               </a:rPr>
-              <a:t>G</a:t>
+              <a:t>H</a:t>
             </a:r>
             <a:endParaRPr lang="en-US" sz="1500" dirty="0"/>
           </a:p>
@@ -23018,7 +23018,7 @@
                 <a:ea typeface="PingFang TC" pitchFamily="34" charset="-122"/>
                 <a:cs typeface="PingFang TC" pitchFamily="34" charset="-120"/>
               </a:rPr>
-              <a:t>對齊 progress.md</a:t>
+              <a:t>另含外部模型接入 1 / 1</a:t>
             </a:r>
             <a:endParaRPr lang="en-US" sz="1500" dirty="0"/>
           </a:p>

--- a/doc/ppt/CloudDrive_專題報告_v3.0.pptx
+++ b/doc/ppt/CloudDrive_專題報告_v3.0.pptx
@@ -6854,7 +6854,7 @@
                 <a:ea typeface="PingFang TC" pitchFamily="34" charset="-122"/>
                 <a:cs typeface="PingFang TC" pitchFamily="34" charset="-120"/>
               </a:rPr>
-              <a:t>三道關卡缺一不可：靜態驗證只產生提案、使用者核可才安裝、安裝後才進沙箱。絕不自動執行未審核的程式碼。</a:t>
+              <a:t>一些限制：通過靜態驗證後只建立 Pending Proposal、使用者核可後才安裝才可進 Sandbox、核可後執行失敗不會自動重新生成——絕不自動執行未審核的程式碼。</a:t>
             </a:r>
             <a:endParaRPr lang="en-US" sz="1500" dirty="0"/>
           </a:p>
@@ -7076,12 +7076,12 @@
         </p:nvSpPr>
         <p:spPr>
           <a:xfrm>
-            <a:off x="566928" y="1627632"/>
-            <a:ext cx="3553968" cy="1280160"/>
+            <a:off x="566928" y="1609344"/>
+            <a:ext cx="3553968" cy="1042416"/>
           </a:xfrm>
           <a:prstGeom prst="roundRect">
             <a:avLst>
-              <a:gd name="adj" fmla="val 3571"/>
+              <a:gd name="adj" fmla="val 4386"/>
             </a:avLst>
           </a:prstGeom>
           <a:solidFill>
@@ -7103,7 +7103,7 @@
         </p:nvSpPr>
         <p:spPr>
           <a:xfrm>
-            <a:off x="566928" y="1627632"/>
+            <a:off x="566928" y="1609344"/>
             <a:ext cx="3553968" cy="45720"/>
           </a:xfrm>
           <a:prstGeom prst="rect">
@@ -7123,8 +7123,8 @@
         </p:nvSpPr>
         <p:spPr>
           <a:xfrm>
-            <a:off x="749808" y="1755648"/>
-            <a:ext cx="292608" cy="274320"/>
+            <a:off x="731520" y="1719072"/>
+            <a:ext cx="274320" cy="274320"/>
           </a:xfrm>
           <a:prstGeom prst="rect">
             <a:avLst/>
@@ -7162,8 +7162,8 @@
         </p:nvSpPr>
         <p:spPr>
           <a:xfrm>
-            <a:off x="1060704" y="1755648"/>
-            <a:ext cx="2877312" cy="274320"/>
+            <a:off x="1024128" y="1719072"/>
+            <a:ext cx="2932176" cy="274320"/>
           </a:xfrm>
           <a:prstGeom prst="rect">
             <a:avLst/>
@@ -7201,8 +7201,8 @@
         </p:nvSpPr>
         <p:spPr>
           <a:xfrm>
-            <a:off x="749808" y="2103120"/>
-            <a:ext cx="3188208" cy="713232"/>
+            <a:off x="731520" y="2048256"/>
+            <a:ext cx="3224784" cy="603504"/>
           </a:xfrm>
           <a:prstGeom prst="rect">
             <a:avLst/>
@@ -7216,7 +7216,7 @@
           <a:p>
             <a:pPr indent="0" marL="0">
               <a:lnSpc>
-                <a:spcPct val="116000"/>
+                <a:spcPct val="114000"/>
               </a:lnSpc>
               <a:buNone/>
             </a:pPr>
@@ -7243,12 +7243,12 @@
         </p:nvSpPr>
         <p:spPr>
           <a:xfrm>
-            <a:off x="4303776" y="1627632"/>
-            <a:ext cx="3553968" cy="1280160"/>
+            <a:off x="4303776" y="1609344"/>
+            <a:ext cx="3553968" cy="1042416"/>
           </a:xfrm>
           <a:prstGeom prst="roundRect">
             <a:avLst>
-              <a:gd name="adj" fmla="val 3571"/>
+              <a:gd name="adj" fmla="val 4386"/>
             </a:avLst>
           </a:prstGeom>
           <a:solidFill>
@@ -7270,7 +7270,7 @@
         </p:nvSpPr>
         <p:spPr>
           <a:xfrm>
-            <a:off x="4303776" y="1627632"/>
+            <a:off x="4303776" y="1609344"/>
             <a:ext cx="3553968" cy="45720"/>
           </a:xfrm>
           <a:prstGeom prst="rect">
@@ -7290,8 +7290,8 @@
         </p:nvSpPr>
         <p:spPr>
           <a:xfrm>
-            <a:off x="4486656" y="1755648"/>
-            <a:ext cx="292608" cy="274320"/>
+            <a:off x="4468368" y="1719072"/>
+            <a:ext cx="274320" cy="274320"/>
           </a:xfrm>
           <a:prstGeom prst="rect">
             <a:avLst/>
@@ -7329,8 +7329,8 @@
         </p:nvSpPr>
         <p:spPr>
           <a:xfrm>
-            <a:off x="4797552" y="1755648"/>
-            <a:ext cx="2877312" cy="274320"/>
+            <a:off x="4760976" y="1719072"/>
+            <a:ext cx="2932176" cy="274320"/>
           </a:xfrm>
           <a:prstGeom prst="rect">
             <a:avLst/>
@@ -7368,8 +7368,8 @@
         </p:nvSpPr>
         <p:spPr>
           <a:xfrm>
-            <a:off x="4486656" y="2103120"/>
-            <a:ext cx="3188208" cy="713232"/>
+            <a:off x="4468368" y="2048256"/>
+            <a:ext cx="3224784" cy="603504"/>
           </a:xfrm>
           <a:prstGeom prst="rect">
             <a:avLst/>
@@ -7383,7 +7383,7 @@
           <a:p>
             <a:pPr indent="0" marL="0">
               <a:lnSpc>
-                <a:spcPct val="116000"/>
+                <a:spcPct val="114000"/>
               </a:lnSpc>
               <a:buNone/>
             </a:pPr>
@@ -7396,7 +7396,7 @@
                 <a:ea typeface="PingFang TC" pitchFamily="34" charset="-122"/>
                 <a:cs typeface="PingFang TC" pitchFamily="34" charset="-120"/>
               </a:rPr>
-              <a:t>真實產品，走同一條路徑</a:t>
+              <a:t>與產品走同一條路徑</a:t>
             </a:r>
             <a:endParaRPr lang="en-US" sz="1500" dirty="0"/>
           </a:p>
@@ -7410,12 +7410,12 @@
         </p:nvSpPr>
         <p:spPr>
           <a:xfrm>
-            <a:off x="8040624" y="1627632"/>
-            <a:ext cx="3553968" cy="1280160"/>
+            <a:off x="8040624" y="1609344"/>
+            <a:ext cx="3553968" cy="1042416"/>
           </a:xfrm>
           <a:prstGeom prst="roundRect">
             <a:avLst>
-              <a:gd name="adj" fmla="val 3571"/>
+              <a:gd name="adj" fmla="val 4386"/>
             </a:avLst>
           </a:prstGeom>
           <a:solidFill>
@@ -7437,7 +7437,7 @@
         </p:nvSpPr>
         <p:spPr>
           <a:xfrm>
-            <a:off x="8040624" y="1627632"/>
+            <a:off x="8040624" y="1609344"/>
             <a:ext cx="3553968" cy="45720"/>
           </a:xfrm>
           <a:prstGeom prst="rect">
@@ -7457,8 +7457,8 @@
         </p:nvSpPr>
         <p:spPr>
           <a:xfrm>
-            <a:off x="8223504" y="1755648"/>
-            <a:ext cx="292608" cy="274320"/>
+            <a:off x="8205216" y="1719072"/>
+            <a:ext cx="274320" cy="274320"/>
           </a:xfrm>
           <a:prstGeom prst="rect">
             <a:avLst/>
@@ -7496,8 +7496,8 @@
         </p:nvSpPr>
         <p:spPr>
           <a:xfrm>
-            <a:off x="8534400" y="1755648"/>
-            <a:ext cx="2877312" cy="274320"/>
+            <a:off x="8497824" y="1719072"/>
+            <a:ext cx="2932176" cy="274320"/>
           </a:xfrm>
           <a:prstGeom prst="rect">
             <a:avLst/>
@@ -7535,8 +7535,8 @@
         </p:nvSpPr>
         <p:spPr>
           <a:xfrm>
-            <a:off x="8223504" y="2103120"/>
-            <a:ext cx="3188208" cy="713232"/>
+            <a:off x="8205216" y="2048256"/>
+            <a:ext cx="3224784" cy="603504"/>
           </a:xfrm>
           <a:prstGeom prst="rect">
             <a:avLst/>
@@ -7550,7 +7550,7 @@
           <a:p>
             <a:pPr indent="0" marL="0">
               <a:lnSpc>
-                <a:spcPct val="116000"/>
+                <a:spcPct val="114000"/>
               </a:lnSpc>
               <a:buNone/>
             </a:pPr>
@@ -7570,7 +7570,7 @@
           <a:p>
             <a:pPr indent="0" marL="0">
               <a:lnSpc>
-                <a:spcPct val="116000"/>
+                <a:spcPct val="114000"/>
               </a:lnSpc>
               <a:buNone/>
             </a:pPr>
@@ -7591,14 +7591,34 @@
       </p:sp>
       <p:sp>
         <p:nvSpPr>
-          <p:cNvPr id="22" name="Text 20"/>
-          <p:cNvSpPr/>
-          <p:nvPr/>
-        </p:nvSpPr>
-        <p:spPr>
-          <a:xfrm>
-            <a:off x="566928" y="3182112"/>
-            <a:ext cx="2743200" cy="274320"/>
+          <p:cNvPr id="22" name="Shape 20"/>
+          <p:cNvSpPr/>
+          <p:nvPr/>
+        </p:nvSpPr>
+        <p:spPr>
+          <a:xfrm>
+            <a:off x="566928" y="2852928"/>
+            <a:ext cx="45720" cy="256032"/>
+          </a:xfrm>
+          <a:prstGeom prst="rect">
+            <a:avLst/>
+          </a:prstGeom>
+          <a:solidFill>
+            <a:srgbClr val="2F6F8F"/>
+          </a:solidFill>
+          <a:ln/>
+        </p:spPr>
+      </p:sp>
+      <p:sp>
+        <p:nvSpPr>
+          <p:cNvPr id="23" name="Text 21"/>
+          <p:cNvSpPr/>
+          <p:nvPr/>
+        </p:nvSpPr>
+        <p:spPr>
+          <a:xfrm>
+            <a:off x="713232" y="2843784"/>
+            <a:ext cx="5486400" cy="274320"/>
           </a:xfrm>
           <a:prstGeom prst="rect">
             <a:avLst/>
@@ -7614,34 +7634,34 @@
               <a:buNone/>
             </a:pPr>
             <a:r>
-              <a:rPr lang="en-US" sz="1700" b="1" dirty="0">
-                <a:solidFill>
-                  <a:srgbClr val="13212A"/>
+              <a:rPr lang="en-US" sz="1500" b="1" dirty="0">
+                <a:solidFill>
+                  <a:srgbClr val="2F6F8F"/>
                 </a:solidFill>
                 <a:latin typeface="PingFang TC" pitchFamily="34" charset="0"/>
                 <a:ea typeface="PingFang TC" pitchFamily="34" charset="-122"/>
                 <a:cs typeface="PingFang TC" pitchFamily="34" charset="-120"/>
               </a:rPr>
-              <a:t>評測管線</a:t>
-            </a:r>
-            <a:endParaRPr lang="en-US" sz="1700" dirty="0"/>
-          </a:p>
-        </p:txBody>
-      </p:sp>
-      <p:sp>
-        <p:nvSpPr>
-          <p:cNvPr id="23" name="Shape 21"/>
-          <p:cNvSpPr/>
-          <p:nvPr/>
-        </p:nvSpPr>
-        <p:spPr>
-          <a:xfrm>
-            <a:off x="566928" y="3547872"/>
-            <a:ext cx="2088490" cy="457200"/>
+              <a:t>Phase 1｜Run the case　執行測試</a:t>
+            </a:r>
+            <a:endParaRPr lang="en-US" sz="1500" dirty="0"/>
+          </a:p>
+        </p:txBody>
+      </p:sp>
+      <p:sp>
+        <p:nvSpPr>
+          <p:cNvPr id="24" name="Shape 22"/>
+          <p:cNvSpPr/>
+          <p:nvPr/>
+        </p:nvSpPr>
+        <p:spPr>
+          <a:xfrm>
+            <a:off x="566928" y="3182112"/>
+            <a:ext cx="2088490" cy="841248"/>
           </a:xfrm>
           <a:prstGeom prst="roundRect">
             <a:avLst>
-              <a:gd name="adj" fmla="val 8000"/>
+              <a:gd name="adj" fmla="val 5435"/>
             </a:avLst>
           </a:prstGeom>
           <a:solidFill>
@@ -7657,14 +7677,14 @@
       </p:sp>
       <p:sp>
         <p:nvSpPr>
-          <p:cNvPr id="24" name="Text 22"/>
-          <p:cNvSpPr/>
-          <p:nvPr/>
-        </p:nvSpPr>
-        <p:spPr>
-          <a:xfrm>
-            <a:off x="603504" y="3547872"/>
-            <a:ext cx="2015338" cy="457200"/>
+          <p:cNvPr id="25" name="Text 23"/>
+          <p:cNvSpPr/>
+          <p:nvPr/>
+        </p:nvSpPr>
+        <p:spPr>
+          <a:xfrm>
+            <a:off x="640080" y="3273552"/>
+            <a:ext cx="1942186" cy="384048"/>
           </a:xfrm>
           <a:prstGeom prst="rect">
             <a:avLst/>
@@ -7677,10 +7697,13 @@
           <a:lstStyle/>
           <a:p>
             <a:pPr algn="ctr" indent="0" marL="0">
-              <a:buNone/>
-            </a:pPr>
-            <a:r>
-              <a:rPr lang="en-US" sz="1500" dirty="0">
+              <a:lnSpc>
+                <a:spcPct val="105000"/>
+              </a:lnSpc>
+              <a:buNone/>
+            </a:pPr>
+            <a:r>
+              <a:rPr lang="en-US" sz="1500" b="1" dirty="0">
                 <a:solidFill>
                   <a:srgbClr val="13212A"/>
                 </a:solidFill>
@@ -7688,7 +7711,7 @@
                 <a:ea typeface="Georgia" pitchFamily="34" charset="-122"/>
                 <a:cs typeface="Georgia" pitchFamily="34" charset="-120"/>
               </a:rPr>
-              <a:t>Case Schema</a:t>
+              <a:t>1　Case Schema</a:t>
             </a:r>
             <a:endParaRPr lang="en-US" sz="1500" dirty="0"/>
           </a:p>
@@ -7696,18 +7719,57 @@
       </p:sp>
       <p:sp>
         <p:nvSpPr>
-          <p:cNvPr id="25" name="Shape 23"/>
-          <p:cNvSpPr/>
-          <p:nvPr/>
-        </p:nvSpPr>
-        <p:spPr>
-          <a:xfrm>
-            <a:off x="2801722" y="3547872"/>
-            <a:ext cx="2088490" cy="457200"/>
+          <p:cNvPr id="26" name="Text 24"/>
+          <p:cNvSpPr/>
+          <p:nvPr/>
+        </p:nvSpPr>
+        <p:spPr>
+          <a:xfrm>
+            <a:off x="640080" y="3675888"/>
+            <a:ext cx="1942186" cy="292608"/>
+          </a:xfrm>
+          <a:prstGeom prst="rect">
+            <a:avLst/>
+          </a:prstGeom>
+          <a:noFill/>
+          <a:ln/>
+        </p:spPr>
+        <p:txBody>
+          <a:bodyPr wrap="square" rtlCol="0" anchor="ctr"/>
+          <a:lstStyle/>
+          <a:p>
+            <a:pPr algn="ctr" indent="0" marL="0">
+              <a:buNone/>
+            </a:pPr>
+            <a:r>
+              <a:rPr lang="en-US" sz="1500" dirty="0">
+                <a:solidFill>
+                  <a:srgbClr val="5B6470"/>
+                </a:solidFill>
+                <a:latin typeface="PingFang TC" pitchFamily="34" charset="0"/>
+                <a:ea typeface="PingFang TC" pitchFamily="34" charset="-122"/>
+                <a:cs typeface="PingFang TC" pitchFamily="34" charset="-120"/>
+              </a:rPr>
+              <a:t>定義測試案例</a:t>
+            </a:r>
+            <a:endParaRPr lang="en-US" sz="1500" dirty="0"/>
+          </a:p>
+        </p:txBody>
+      </p:sp>
+      <p:sp>
+        <p:nvSpPr>
+          <p:cNvPr id="27" name="Shape 25"/>
+          <p:cNvSpPr/>
+          <p:nvPr/>
+        </p:nvSpPr>
+        <p:spPr>
+          <a:xfrm>
+            <a:off x="2801722" y="3182112"/>
+            <a:ext cx="2088490" cy="841248"/>
           </a:xfrm>
           <a:prstGeom prst="roundRect">
             <a:avLst>
-              <a:gd name="adj" fmla="val 8000"/>
+              <a:gd name="adj" fmla="val 5435"/>
             </a:avLst>
           </a:prstGeom>
           <a:solidFill>
@@ -7723,14 +7785,14 @@
       </p:sp>
       <p:sp>
         <p:nvSpPr>
-          <p:cNvPr id="26" name="Text 24"/>
-          <p:cNvSpPr/>
-          <p:nvPr/>
-        </p:nvSpPr>
-        <p:spPr>
-          <a:xfrm>
-            <a:off x="2838298" y="3547872"/>
-            <a:ext cx="2015338" cy="457200"/>
+          <p:cNvPr id="28" name="Text 26"/>
+          <p:cNvSpPr/>
+          <p:nvPr/>
+        </p:nvSpPr>
+        <p:spPr>
+          <a:xfrm>
+            <a:off x="2874874" y="3273552"/>
+            <a:ext cx="1942186" cy="384048"/>
           </a:xfrm>
           <a:prstGeom prst="rect">
             <a:avLst/>
@@ -7743,10 +7805,13 @@
           <a:lstStyle/>
           <a:p>
             <a:pPr algn="ctr" indent="0" marL="0">
-              <a:buNone/>
-            </a:pPr>
-            <a:r>
-              <a:rPr lang="en-US" sz="1500" dirty="0">
+              <a:lnSpc>
+                <a:spcPct val="105000"/>
+              </a:lnSpc>
+              <a:buNone/>
+            </a:pPr>
+            <a:r>
+              <a:rPr lang="en-US" sz="1500" b="1" dirty="0">
                 <a:solidFill>
                   <a:srgbClr val="13212A"/>
                 </a:solidFill>
@@ -7754,7 +7819,7 @@
                 <a:ea typeface="Georgia" pitchFamily="34" charset="-122"/>
                 <a:cs typeface="Georgia" pitchFamily="34" charset="-120"/>
               </a:rPr>
-              <a:t>Fixture Builder</a:t>
+              <a:t>2　Fixture Builder</a:t>
             </a:r>
             <a:endParaRPr lang="en-US" sz="1500" dirty="0"/>
           </a:p>
@@ -7762,18 +7827,57 @@
       </p:sp>
       <p:sp>
         <p:nvSpPr>
-          <p:cNvPr id="27" name="Shape 25"/>
-          <p:cNvSpPr/>
-          <p:nvPr/>
-        </p:nvSpPr>
-        <p:spPr>
-          <a:xfrm>
-            <a:off x="5036515" y="3547872"/>
-            <a:ext cx="2088490" cy="457200"/>
+          <p:cNvPr id="29" name="Text 27"/>
+          <p:cNvSpPr/>
+          <p:nvPr/>
+        </p:nvSpPr>
+        <p:spPr>
+          <a:xfrm>
+            <a:off x="2874874" y="3675888"/>
+            <a:ext cx="1942186" cy="292608"/>
+          </a:xfrm>
+          <a:prstGeom prst="rect">
+            <a:avLst/>
+          </a:prstGeom>
+          <a:noFill/>
+          <a:ln/>
+        </p:spPr>
+        <p:txBody>
+          <a:bodyPr wrap="square" rtlCol="0" anchor="ctr"/>
+          <a:lstStyle/>
+          <a:p>
+            <a:pPr algn="ctr" indent="0" marL="0">
+              <a:buNone/>
+            </a:pPr>
+            <a:r>
+              <a:rPr lang="en-US" sz="1500" dirty="0">
+                <a:solidFill>
+                  <a:srgbClr val="5B6470"/>
+                </a:solidFill>
+                <a:latin typeface="PingFang TC" pitchFamily="34" charset="0"/>
+                <a:ea typeface="PingFang TC" pitchFamily="34" charset="-122"/>
+                <a:cs typeface="PingFang TC" pitchFamily="34" charset="-120"/>
+              </a:rPr>
+              <a:t>建立真實資料</a:t>
+            </a:r>
+            <a:endParaRPr lang="en-US" sz="1500" dirty="0"/>
+          </a:p>
+        </p:txBody>
+      </p:sp>
+      <p:sp>
+        <p:nvSpPr>
+          <p:cNvPr id="30" name="Shape 28"/>
+          <p:cNvSpPr/>
+          <p:nvPr/>
+        </p:nvSpPr>
+        <p:spPr>
+          <a:xfrm>
+            <a:off x="5036515" y="3182112"/>
+            <a:ext cx="2088490" cy="841248"/>
           </a:xfrm>
           <a:prstGeom prst="roundRect">
             <a:avLst>
-              <a:gd name="adj" fmla="val 8000"/>
+              <a:gd name="adj" fmla="val 5435"/>
             </a:avLst>
           </a:prstGeom>
           <a:solidFill>
@@ -7789,14 +7893,14 @@
       </p:sp>
       <p:sp>
         <p:nvSpPr>
-          <p:cNvPr id="28" name="Text 26"/>
-          <p:cNvSpPr/>
-          <p:nvPr/>
-        </p:nvSpPr>
-        <p:spPr>
-          <a:xfrm>
-            <a:off x="5073091" y="3547872"/>
-            <a:ext cx="2015338" cy="457200"/>
+          <p:cNvPr id="31" name="Text 29"/>
+          <p:cNvSpPr/>
+          <p:nvPr/>
+        </p:nvSpPr>
+        <p:spPr>
+          <a:xfrm>
+            <a:off x="5109667" y="3273552"/>
+            <a:ext cx="1942186" cy="384048"/>
           </a:xfrm>
           <a:prstGeom prst="rect">
             <a:avLst/>
@@ -7809,10 +7913,13 @@
           <a:lstStyle/>
           <a:p>
             <a:pPr algn="ctr" indent="0" marL="0">
-              <a:buNone/>
-            </a:pPr>
-            <a:r>
-              <a:rPr lang="en-US" sz="1500" dirty="0">
+              <a:lnSpc>
+                <a:spcPct val="105000"/>
+              </a:lnSpc>
+              <a:buNone/>
+            </a:pPr>
+            <a:r>
+              <a:rPr lang="en-US" sz="1500" b="1" dirty="0">
                 <a:solidFill>
                   <a:srgbClr val="13212A"/>
                 </a:solidFill>
@@ -7820,7 +7927,7 @@
                 <a:ea typeface="Georgia" pitchFamily="34" charset="-122"/>
                 <a:cs typeface="Georgia" pitchFamily="34" charset="-120"/>
               </a:rPr>
-              <a:t>Evaluation Runner</a:t>
+              <a:t>3　Runner</a:t>
             </a:r>
             <a:endParaRPr lang="en-US" sz="1500" dirty="0"/>
           </a:p>
@@ -7828,18 +7935,57 @@
       </p:sp>
       <p:sp>
         <p:nvSpPr>
-          <p:cNvPr id="29" name="Shape 27"/>
-          <p:cNvSpPr/>
-          <p:nvPr/>
-        </p:nvSpPr>
-        <p:spPr>
-          <a:xfrm>
-            <a:off x="7271309" y="3547872"/>
-            <a:ext cx="2088490" cy="457200"/>
+          <p:cNvPr id="32" name="Text 30"/>
+          <p:cNvSpPr/>
+          <p:nvPr/>
+        </p:nvSpPr>
+        <p:spPr>
+          <a:xfrm>
+            <a:off x="5109667" y="3675888"/>
+            <a:ext cx="1942186" cy="292608"/>
+          </a:xfrm>
+          <a:prstGeom prst="rect">
+            <a:avLst/>
+          </a:prstGeom>
+          <a:noFill/>
+          <a:ln/>
+        </p:spPr>
+        <p:txBody>
+          <a:bodyPr wrap="square" rtlCol="0" anchor="ctr"/>
+          <a:lstStyle/>
+          <a:p>
+            <a:pPr algn="ctr" indent="0" marL="0">
+              <a:buNone/>
+            </a:pPr>
+            <a:r>
+              <a:rPr lang="en-US" sz="1500" dirty="0">
+                <a:solidFill>
+                  <a:srgbClr val="5B6470"/>
+                </a:solidFill>
+                <a:latin typeface="PingFang TC" pitchFamily="34" charset="0"/>
+                <a:ea typeface="PingFang TC" pitchFamily="34" charset="-122"/>
+                <a:cs typeface="PingFang TC" pitchFamily="34" charset="-120"/>
+              </a:rPr>
+              <a:t>執行測試流程</a:t>
+            </a:r>
+            <a:endParaRPr lang="en-US" sz="1500" dirty="0"/>
+          </a:p>
+        </p:txBody>
+      </p:sp>
+      <p:sp>
+        <p:nvSpPr>
+          <p:cNvPr id="33" name="Shape 31"/>
+          <p:cNvSpPr/>
+          <p:nvPr/>
+        </p:nvSpPr>
+        <p:spPr>
+          <a:xfrm>
+            <a:off x="7271309" y="3182112"/>
+            <a:ext cx="2088490" cy="841248"/>
           </a:xfrm>
           <a:prstGeom prst="roundRect">
             <a:avLst>
-              <a:gd name="adj" fmla="val 8000"/>
+              <a:gd name="adj" fmla="val 5435"/>
             </a:avLst>
           </a:prstGeom>
           <a:solidFill>
@@ -7855,14 +8001,14 @@
       </p:sp>
       <p:sp>
         <p:nvSpPr>
-          <p:cNvPr id="30" name="Text 28"/>
-          <p:cNvSpPr/>
-          <p:nvPr/>
-        </p:nvSpPr>
-        <p:spPr>
-          <a:xfrm>
-            <a:off x="7307885" y="3547872"/>
-            <a:ext cx="2015338" cy="457200"/>
+          <p:cNvPr id="34" name="Text 32"/>
+          <p:cNvSpPr/>
+          <p:nvPr/>
+        </p:nvSpPr>
+        <p:spPr>
+          <a:xfrm>
+            <a:off x="7344461" y="3273552"/>
+            <a:ext cx="1942186" cy="384048"/>
           </a:xfrm>
           <a:prstGeom prst="rect">
             <a:avLst/>
@@ -7875,10 +8021,13 @@
           <a:lstStyle/>
           <a:p>
             <a:pPr algn="ctr" indent="0" marL="0">
-              <a:buNone/>
-            </a:pPr>
-            <a:r>
-              <a:rPr lang="en-US" sz="1500" dirty="0">
+              <a:lnSpc>
+                <a:spcPct val="105000"/>
+              </a:lnSpc>
+              <a:buNone/>
+            </a:pPr>
+            <a:r>
+              <a:rPr lang="en-US" sz="1500" b="1" dirty="0">
                 <a:solidFill>
                   <a:srgbClr val="13212A"/>
                 </a:solidFill>
@@ -7886,7 +8035,7 @@
                 <a:ea typeface="Georgia" pitchFamily="34" charset="-122"/>
                 <a:cs typeface="Georgia" pitchFamily="34" charset="-120"/>
               </a:rPr>
-              <a:t>Production API</a:t>
+              <a:t>4　Production API</a:t>
             </a:r>
             <a:endParaRPr lang="en-US" sz="1500" dirty="0"/>
           </a:p>
@@ -7894,18 +8043,57 @@
       </p:sp>
       <p:sp>
         <p:nvSpPr>
-          <p:cNvPr id="31" name="Shape 29"/>
-          <p:cNvSpPr/>
-          <p:nvPr/>
-        </p:nvSpPr>
-        <p:spPr>
-          <a:xfrm>
-            <a:off x="9506102" y="3547872"/>
-            <a:ext cx="2088490" cy="457200"/>
+          <p:cNvPr id="35" name="Text 33"/>
+          <p:cNvSpPr/>
+          <p:nvPr/>
+        </p:nvSpPr>
+        <p:spPr>
+          <a:xfrm>
+            <a:off x="7344461" y="3675888"/>
+            <a:ext cx="1942186" cy="292608"/>
+          </a:xfrm>
+          <a:prstGeom prst="rect">
+            <a:avLst/>
+          </a:prstGeom>
+          <a:noFill/>
+          <a:ln/>
+        </p:spPr>
+        <p:txBody>
+          <a:bodyPr wrap="square" rtlCol="0" anchor="ctr"/>
+          <a:lstStyle/>
+          <a:p>
+            <a:pPr algn="ctr" indent="0" marL="0">
+              <a:buNone/>
+            </a:pPr>
+            <a:r>
+              <a:rPr lang="en-US" sz="1500" dirty="0">
+                <a:solidFill>
+                  <a:srgbClr val="5B6470"/>
+                </a:solidFill>
+                <a:latin typeface="PingFang TC" pitchFamily="34" charset="0"/>
+                <a:ea typeface="PingFang TC" pitchFamily="34" charset="-122"/>
+                <a:cs typeface="PingFang TC" pitchFamily="34" charset="-120"/>
+              </a:rPr>
+              <a:t>正式產品路徑</a:t>
+            </a:r>
+            <a:endParaRPr lang="en-US" sz="1500" dirty="0"/>
+          </a:p>
+        </p:txBody>
+      </p:sp>
+      <p:sp>
+        <p:nvSpPr>
+          <p:cNvPr id="36" name="Shape 34"/>
+          <p:cNvSpPr/>
+          <p:nvPr/>
+        </p:nvSpPr>
+        <p:spPr>
+          <a:xfrm>
+            <a:off x="9506102" y="3182112"/>
+            <a:ext cx="2088490" cy="841248"/>
           </a:xfrm>
           <a:prstGeom prst="roundRect">
             <a:avLst>
-              <a:gd name="adj" fmla="val 8000"/>
+              <a:gd name="adj" fmla="val 5435"/>
             </a:avLst>
           </a:prstGeom>
           <a:solidFill>
@@ -7921,14 +8109,14 @@
       </p:sp>
       <p:sp>
         <p:nvSpPr>
-          <p:cNvPr id="32" name="Text 30"/>
-          <p:cNvSpPr/>
-          <p:nvPr/>
-        </p:nvSpPr>
-        <p:spPr>
-          <a:xfrm>
-            <a:off x="9542678" y="3547872"/>
-            <a:ext cx="2015338" cy="457200"/>
+          <p:cNvPr id="37" name="Text 35"/>
+          <p:cNvSpPr/>
+          <p:nvPr/>
+        </p:nvSpPr>
+        <p:spPr>
+          <a:xfrm>
+            <a:off x="9579254" y="3273552"/>
+            <a:ext cx="1942186" cy="384048"/>
           </a:xfrm>
           <a:prstGeom prst="rect">
             <a:avLst/>
@@ -7941,10 +8129,13 @@
           <a:lstStyle/>
           <a:p>
             <a:pPr algn="ctr" indent="0" marL="0">
-              <a:buNone/>
-            </a:pPr>
-            <a:r>
-              <a:rPr lang="en-US" sz="1500" dirty="0">
+              <a:lnSpc>
+                <a:spcPct val="105000"/>
+              </a:lnSpc>
+              <a:buNone/>
+            </a:pPr>
+            <a:r>
+              <a:rPr lang="en-US" sz="1500" b="1" dirty="0">
                 <a:solidFill>
                   <a:srgbClr val="13212A"/>
                 </a:solidFill>
@@ -7952,7 +8143,7 @@
                 <a:ea typeface="Georgia" pitchFamily="34" charset="-122"/>
                 <a:cs typeface="Georgia" pitchFamily="34" charset="-120"/>
               </a:rPr>
-              <a:t>Approval Handling</a:t>
+              <a:t>5　Approval Handling</a:t>
             </a:r>
             <a:endParaRPr lang="en-US" sz="1500" dirty="0"/>
           </a:p>
@@ -7960,18 +8151,116 @@
       </p:sp>
       <p:sp>
         <p:nvSpPr>
-          <p:cNvPr id="33" name="Shape 31"/>
-          <p:cNvSpPr/>
-          <p:nvPr/>
-        </p:nvSpPr>
-        <p:spPr>
-          <a:xfrm>
-            <a:off x="566928" y="4114800"/>
-            <a:ext cx="2088490" cy="457200"/>
+          <p:cNvPr id="38" name="Text 36"/>
+          <p:cNvSpPr/>
+          <p:nvPr/>
+        </p:nvSpPr>
+        <p:spPr>
+          <a:xfrm>
+            <a:off x="9579254" y="3675888"/>
+            <a:ext cx="1942186" cy="292608"/>
+          </a:xfrm>
+          <a:prstGeom prst="rect">
+            <a:avLst/>
+          </a:prstGeom>
+          <a:noFill/>
+          <a:ln/>
+        </p:spPr>
+        <p:txBody>
+          <a:bodyPr wrap="square" rtlCol="0" anchor="ctr"/>
+          <a:lstStyle/>
+          <a:p>
+            <a:pPr algn="ctr" indent="0" marL="0">
+              <a:buNone/>
+            </a:pPr>
+            <a:r>
+              <a:rPr lang="en-US" sz="1500" dirty="0">
+                <a:solidFill>
+                  <a:srgbClr val="5B6470"/>
+                </a:solidFill>
+                <a:latin typeface="PingFang TC" pitchFamily="34" charset="0"/>
+                <a:ea typeface="PingFang TC" pitchFamily="34" charset="-122"/>
+                <a:cs typeface="PingFang TC" pitchFamily="34" charset="-120"/>
+              </a:rPr>
+              <a:t>核可處理</a:t>
+            </a:r>
+            <a:endParaRPr lang="en-US" sz="1500" dirty="0"/>
+          </a:p>
+        </p:txBody>
+      </p:sp>
+      <p:sp>
+        <p:nvSpPr>
+          <p:cNvPr id="39" name="Shape 37"/>
+          <p:cNvSpPr/>
+          <p:nvPr/>
+        </p:nvSpPr>
+        <p:spPr>
+          <a:xfrm>
+            <a:off x="566928" y="4169664"/>
+            <a:ext cx="45720" cy="256032"/>
+          </a:xfrm>
+          <a:prstGeom prst="rect">
+            <a:avLst/>
+          </a:prstGeom>
+          <a:solidFill>
+            <a:srgbClr val="5E8F72"/>
+          </a:solidFill>
+          <a:ln/>
+        </p:spPr>
+      </p:sp>
+      <p:sp>
+        <p:nvSpPr>
+          <p:cNvPr id="40" name="Text 38"/>
+          <p:cNvSpPr/>
+          <p:nvPr/>
+        </p:nvSpPr>
+        <p:spPr>
+          <a:xfrm>
+            <a:off x="713232" y="4160520"/>
+            <a:ext cx="5486400" cy="274320"/>
+          </a:xfrm>
+          <a:prstGeom prst="rect">
+            <a:avLst/>
+          </a:prstGeom>
+          <a:noFill/>
+          <a:ln/>
+        </p:spPr>
+        <p:txBody>
+          <a:bodyPr wrap="square" rtlCol="0" anchor="ctr"/>
+          <a:lstStyle/>
+          <a:p>
+            <a:pPr indent="0" marL="0">
+              <a:buNone/>
+            </a:pPr>
+            <a:r>
+              <a:rPr lang="en-US" sz="1500" b="1" dirty="0">
+                <a:solidFill>
+                  <a:srgbClr val="5E8F72"/>
+                </a:solidFill>
+                <a:latin typeface="PingFang TC" pitchFamily="34" charset="0"/>
+                <a:ea typeface="PingFang TC" pitchFamily="34" charset="-122"/>
+                <a:cs typeface="PingFang TC" pitchFamily="34" charset="-120"/>
+              </a:rPr>
+              <a:t>Phase 2｜Verify the result　驗證結果</a:t>
+            </a:r>
+            <a:endParaRPr lang="en-US" sz="1500" dirty="0"/>
+          </a:p>
+        </p:txBody>
+      </p:sp>
+      <p:sp>
+        <p:nvSpPr>
+          <p:cNvPr id="41" name="Shape 39"/>
+          <p:cNvSpPr/>
+          <p:nvPr/>
+        </p:nvSpPr>
+        <p:spPr>
+          <a:xfrm>
+            <a:off x="566928" y="4498848"/>
+            <a:ext cx="2088490" cy="841248"/>
           </a:xfrm>
           <a:prstGeom prst="roundRect">
             <a:avLst>
-              <a:gd name="adj" fmla="val 8000"/>
+              <a:gd name="adj" fmla="val 5435"/>
             </a:avLst>
           </a:prstGeom>
           <a:solidFill>
@@ -7987,14 +8276,14 @@
       </p:sp>
       <p:sp>
         <p:nvSpPr>
-          <p:cNvPr id="34" name="Text 32"/>
-          <p:cNvSpPr/>
-          <p:nvPr/>
-        </p:nvSpPr>
-        <p:spPr>
-          <a:xfrm>
-            <a:off x="603504" y="4114800"/>
-            <a:ext cx="2015338" cy="457200"/>
+          <p:cNvPr id="42" name="Text 40"/>
+          <p:cNvSpPr/>
+          <p:nvPr/>
+        </p:nvSpPr>
+        <p:spPr>
+          <a:xfrm>
+            <a:off x="640080" y="4590288"/>
+            <a:ext cx="1942186" cy="384048"/>
           </a:xfrm>
           <a:prstGeom prst="rect">
             <a:avLst/>
@@ -8007,10 +8296,13 @@
           <a:lstStyle/>
           <a:p>
             <a:pPr algn="ctr" indent="0" marL="0">
-              <a:buNone/>
-            </a:pPr>
-            <a:r>
-              <a:rPr lang="en-US" sz="1500" dirty="0">
+              <a:lnSpc>
+                <a:spcPct val="105000"/>
+              </a:lnSpc>
+              <a:buNone/>
+            </a:pPr>
+            <a:r>
+              <a:rPr lang="en-US" sz="1500" b="1" dirty="0">
                 <a:solidFill>
                   <a:srgbClr val="13212A"/>
                 </a:solidFill>
@@ -8018,7 +8310,7 @@
                 <a:ea typeface="Georgia" pitchFamily="34" charset="-122"/>
                 <a:cs typeface="Georgia" pitchFamily="34" charset="-120"/>
               </a:rPr>
-              <a:t>Result Collector</a:t>
+              <a:t>6　Result Collector</a:t>
             </a:r>
             <a:endParaRPr lang="en-US" sz="1500" dirty="0"/>
           </a:p>
@@ -8026,24 +8318,63 @@
       </p:sp>
       <p:sp>
         <p:nvSpPr>
-          <p:cNvPr id="35" name="Shape 33"/>
-          <p:cNvSpPr/>
-          <p:nvPr/>
-        </p:nvSpPr>
-        <p:spPr>
-          <a:xfrm>
-            <a:off x="2801722" y="4114800"/>
-            <a:ext cx="2088490" cy="457200"/>
+          <p:cNvPr id="43" name="Text 41"/>
+          <p:cNvSpPr/>
+          <p:nvPr/>
+        </p:nvSpPr>
+        <p:spPr>
+          <a:xfrm>
+            <a:off x="640080" y="4992624"/>
+            <a:ext cx="1942186" cy="292608"/>
+          </a:xfrm>
+          <a:prstGeom prst="rect">
+            <a:avLst/>
+          </a:prstGeom>
+          <a:noFill/>
+          <a:ln/>
+        </p:spPr>
+        <p:txBody>
+          <a:bodyPr wrap="square" rtlCol="0" anchor="ctr"/>
+          <a:lstStyle/>
+          <a:p>
+            <a:pPr algn="ctr" indent="0" marL="0">
+              <a:buNone/>
+            </a:pPr>
+            <a:r>
+              <a:rPr lang="en-US" sz="1500" dirty="0">
+                <a:solidFill>
+                  <a:srgbClr val="5B6470"/>
+                </a:solidFill>
+                <a:latin typeface="PingFang TC" pitchFamily="34" charset="0"/>
+                <a:ea typeface="PingFang TC" pitchFamily="34" charset="-122"/>
+                <a:cs typeface="PingFang TC" pitchFamily="34" charset="-120"/>
+              </a:rPr>
+              <a:t>搜集結果</a:t>
+            </a:r>
+            <a:endParaRPr lang="en-US" sz="1500" dirty="0"/>
+          </a:p>
+        </p:txBody>
+      </p:sp>
+      <p:sp>
+        <p:nvSpPr>
+          <p:cNvPr id="44" name="Shape 42"/>
+          <p:cNvSpPr/>
+          <p:nvPr/>
+        </p:nvSpPr>
+        <p:spPr>
+          <a:xfrm>
+            <a:off x="2801722" y="4498848"/>
+            <a:ext cx="2088490" cy="841248"/>
           </a:xfrm>
           <a:prstGeom prst="roundRect">
             <a:avLst>
-              <a:gd name="adj" fmla="val 8000"/>
+              <a:gd name="adj" fmla="val 5435"/>
             </a:avLst>
           </a:prstGeom>
           <a:solidFill>
             <a:srgbClr val="5E8F72"/>
           </a:solidFill>
-          <a:ln w="17780">
+          <a:ln w="16510">
             <a:solidFill>
               <a:srgbClr val="5E8F72"/>
             </a:solidFill>
@@ -8053,14 +8384,14 @@
       </p:sp>
       <p:sp>
         <p:nvSpPr>
-          <p:cNvPr id="36" name="Text 34"/>
-          <p:cNvSpPr/>
-          <p:nvPr/>
-        </p:nvSpPr>
-        <p:spPr>
-          <a:xfrm>
-            <a:off x="2838298" y="4114800"/>
-            <a:ext cx="2015338" cy="457200"/>
+          <p:cNvPr id="45" name="Text 43"/>
+          <p:cNvSpPr/>
+          <p:nvPr/>
+        </p:nvSpPr>
+        <p:spPr>
+          <a:xfrm>
+            <a:off x="2874874" y="4590288"/>
+            <a:ext cx="1942186" cy="384048"/>
           </a:xfrm>
           <a:prstGeom prst="rect">
             <a:avLst/>
@@ -8073,6 +8404,9 @@
           <a:lstStyle/>
           <a:p>
             <a:pPr algn="ctr" indent="0" marL="0">
+              <a:lnSpc>
+                <a:spcPct val="105000"/>
+              </a:lnSpc>
               <a:buNone/>
             </a:pPr>
             <a:r>
@@ -8084,7 +8418,7 @@
                 <a:ea typeface="Georgia" pitchFamily="34" charset="-122"/>
                 <a:cs typeface="Georgia" pitchFamily="34" charset="-120"/>
               </a:rPr>
-              <a:t>Deterministic Verifier</a:t>
+              <a:t>7　Deterministic Verifier</a:t>
             </a:r>
             <a:endParaRPr lang="en-US" sz="1500" dirty="0"/>
           </a:p>
@@ -8092,18 +8426,57 @@
       </p:sp>
       <p:sp>
         <p:nvSpPr>
-          <p:cNvPr id="37" name="Shape 35"/>
-          <p:cNvSpPr/>
-          <p:nvPr/>
-        </p:nvSpPr>
-        <p:spPr>
-          <a:xfrm>
-            <a:off x="5036515" y="4114800"/>
-            <a:ext cx="2088490" cy="457200"/>
+          <p:cNvPr id="46" name="Text 44"/>
+          <p:cNvSpPr/>
+          <p:nvPr/>
+        </p:nvSpPr>
+        <p:spPr>
+          <a:xfrm>
+            <a:off x="2874874" y="4992624"/>
+            <a:ext cx="1942186" cy="292608"/>
+          </a:xfrm>
+          <a:prstGeom prst="rect">
+            <a:avLst/>
+          </a:prstGeom>
+          <a:noFill/>
+          <a:ln/>
+        </p:spPr>
+        <p:txBody>
+          <a:bodyPr wrap="square" rtlCol="0" anchor="ctr"/>
+          <a:lstStyle/>
+          <a:p>
+            <a:pPr algn="ctr" indent="0" marL="0">
+              <a:buNone/>
+            </a:pPr>
+            <a:r>
+              <a:rPr lang="en-US" sz="1500" dirty="0">
+                <a:solidFill>
+                  <a:srgbClr val="FFFFFF"/>
+                </a:solidFill>
+                <a:latin typeface="PingFang TC" pitchFamily="34" charset="0"/>
+                <a:ea typeface="PingFang TC" pitchFamily="34" charset="-122"/>
+                <a:cs typeface="PingFang TC" pitchFamily="34" charset="-120"/>
+              </a:rPr>
+              <a:t>固定規則驗證</a:t>
+            </a:r>
+            <a:endParaRPr lang="en-US" sz="1500" dirty="0"/>
+          </a:p>
+        </p:txBody>
+      </p:sp>
+      <p:sp>
+        <p:nvSpPr>
+          <p:cNvPr id="47" name="Shape 45"/>
+          <p:cNvSpPr/>
+          <p:nvPr/>
+        </p:nvSpPr>
+        <p:spPr>
+          <a:xfrm>
+            <a:off x="5036515" y="4498848"/>
+            <a:ext cx="2088490" cy="841248"/>
           </a:xfrm>
           <a:prstGeom prst="roundRect">
             <a:avLst>
-              <a:gd name="adj" fmla="val 8000"/>
+              <a:gd name="adj" fmla="val 5435"/>
             </a:avLst>
           </a:prstGeom>
           <a:solidFill>
@@ -8119,14 +8492,14 @@
       </p:sp>
       <p:sp>
         <p:nvSpPr>
-          <p:cNvPr id="38" name="Text 36"/>
-          <p:cNvSpPr/>
-          <p:nvPr/>
-        </p:nvSpPr>
-        <p:spPr>
-          <a:xfrm>
-            <a:off x="5073091" y="4114800"/>
-            <a:ext cx="2015338" cy="457200"/>
+          <p:cNvPr id="48" name="Text 46"/>
+          <p:cNvSpPr/>
+          <p:nvPr/>
+        </p:nvSpPr>
+        <p:spPr>
+          <a:xfrm>
+            <a:off x="5109667" y="4590288"/>
+            <a:ext cx="1942186" cy="384048"/>
           </a:xfrm>
           <a:prstGeom prst="rect">
             <a:avLst/>
@@ -8139,10 +8512,13 @@
           <a:lstStyle/>
           <a:p>
             <a:pPr algn="ctr" indent="0" marL="0">
-              <a:buNone/>
-            </a:pPr>
-            <a:r>
-              <a:rPr lang="en-US" sz="1500" dirty="0">
+              <a:lnSpc>
+                <a:spcPct val="105000"/>
+              </a:lnSpc>
+              <a:buNone/>
+            </a:pPr>
+            <a:r>
+              <a:rPr lang="en-US" sz="1500" b="1" dirty="0">
                 <a:solidFill>
                   <a:srgbClr val="13212A"/>
                 </a:solidFill>
@@ -8150,7 +8526,7 @@
                 <a:ea typeface="Georgia" pitchFamily="34" charset="-122"/>
                 <a:cs typeface="Georgia" pitchFamily="34" charset="-120"/>
               </a:rPr>
-              <a:t>Scoring</a:t>
+              <a:t>8　Scoring</a:t>
             </a:r>
             <a:endParaRPr lang="en-US" sz="1500" dirty="0"/>
           </a:p>
@@ -8158,18 +8534,57 @@
       </p:sp>
       <p:sp>
         <p:nvSpPr>
-          <p:cNvPr id="39" name="Shape 37"/>
-          <p:cNvSpPr/>
-          <p:nvPr/>
-        </p:nvSpPr>
-        <p:spPr>
-          <a:xfrm>
-            <a:off x="7271309" y="4114800"/>
-            <a:ext cx="2088490" cy="457200"/>
+          <p:cNvPr id="49" name="Text 47"/>
+          <p:cNvSpPr/>
+          <p:nvPr/>
+        </p:nvSpPr>
+        <p:spPr>
+          <a:xfrm>
+            <a:off x="5109667" y="4992624"/>
+            <a:ext cx="1942186" cy="292608"/>
+          </a:xfrm>
+          <a:prstGeom prst="rect">
+            <a:avLst/>
+          </a:prstGeom>
+          <a:noFill/>
+          <a:ln/>
+        </p:spPr>
+        <p:txBody>
+          <a:bodyPr wrap="square" rtlCol="0" anchor="ctr"/>
+          <a:lstStyle/>
+          <a:p>
+            <a:pPr algn="ctr" indent="0" marL="0">
+              <a:buNone/>
+            </a:pPr>
+            <a:r>
+              <a:rPr lang="en-US" sz="1500" dirty="0">
+                <a:solidFill>
+                  <a:srgbClr val="5B6470"/>
+                </a:solidFill>
+                <a:latin typeface="PingFang TC" pitchFamily="34" charset="0"/>
+                <a:ea typeface="PingFang TC" pitchFamily="34" charset="-122"/>
+                <a:cs typeface="PingFang TC" pitchFamily="34" charset="-120"/>
+              </a:rPr>
+              <a:t>評分</a:t>
+            </a:r>
+            <a:endParaRPr lang="en-US" sz="1500" dirty="0"/>
+          </a:p>
+        </p:txBody>
+      </p:sp>
+      <p:sp>
+        <p:nvSpPr>
+          <p:cNvPr id="50" name="Shape 48"/>
+          <p:cNvSpPr/>
+          <p:nvPr/>
+        </p:nvSpPr>
+        <p:spPr>
+          <a:xfrm>
+            <a:off x="7271309" y="4498848"/>
+            <a:ext cx="2088490" cy="841248"/>
           </a:xfrm>
           <a:prstGeom prst="roundRect">
             <a:avLst>
-              <a:gd name="adj" fmla="val 8000"/>
+              <a:gd name="adj" fmla="val 5435"/>
             </a:avLst>
           </a:prstGeom>
           <a:solidFill>
@@ -8185,14 +8600,14 @@
       </p:sp>
       <p:sp>
         <p:nvSpPr>
-          <p:cNvPr id="40" name="Text 38"/>
-          <p:cNvSpPr/>
-          <p:nvPr/>
-        </p:nvSpPr>
-        <p:spPr>
-          <a:xfrm>
-            <a:off x="7307885" y="4114800"/>
-            <a:ext cx="2015338" cy="457200"/>
+          <p:cNvPr id="51" name="Text 49"/>
+          <p:cNvSpPr/>
+          <p:nvPr/>
+        </p:nvSpPr>
+        <p:spPr>
+          <a:xfrm>
+            <a:off x="7344461" y="4590288"/>
+            <a:ext cx="1942186" cy="384048"/>
           </a:xfrm>
           <a:prstGeom prst="rect">
             <a:avLst/>
@@ -8205,10 +8620,13 @@
           <a:lstStyle/>
           <a:p>
             <a:pPr algn="ctr" indent="0" marL="0">
-              <a:buNone/>
-            </a:pPr>
-            <a:r>
-              <a:rPr lang="en-US" sz="1500" dirty="0">
+              <a:lnSpc>
+                <a:spcPct val="105000"/>
+              </a:lnSpc>
+              <a:buNone/>
+            </a:pPr>
+            <a:r>
+              <a:rPr lang="en-US" sz="1500" b="1" dirty="0">
                 <a:solidFill>
                   <a:srgbClr val="13212A"/>
                 </a:solidFill>
@@ -8216,7 +8634,7 @@
                 <a:ea typeface="Georgia" pitchFamily="34" charset="-122"/>
                 <a:cs typeface="Georgia" pitchFamily="34" charset="-120"/>
               </a:rPr>
-              <a:t>Run Aggregation</a:t>
+              <a:t>9　Report</a:t>
             </a:r>
             <a:endParaRPr lang="en-US" sz="1500" dirty="0"/>
           </a:p>
@@ -8224,84 +8642,57 @@
       </p:sp>
       <p:sp>
         <p:nvSpPr>
-          <p:cNvPr id="41" name="Shape 39"/>
-          <p:cNvSpPr/>
-          <p:nvPr/>
-        </p:nvSpPr>
-        <p:spPr>
-          <a:xfrm>
-            <a:off x="9506102" y="4114800"/>
-            <a:ext cx="2088490" cy="457200"/>
+          <p:cNvPr id="52" name="Text 50"/>
+          <p:cNvSpPr/>
+          <p:nvPr/>
+        </p:nvSpPr>
+        <p:spPr>
+          <a:xfrm>
+            <a:off x="7344461" y="4992624"/>
+            <a:ext cx="1942186" cy="292608"/>
+          </a:xfrm>
+          <a:prstGeom prst="rect">
+            <a:avLst/>
+          </a:prstGeom>
+          <a:noFill/>
+          <a:ln/>
+        </p:spPr>
+        <p:txBody>
+          <a:bodyPr wrap="square" rtlCol="0" anchor="ctr"/>
+          <a:lstStyle/>
+          <a:p>
+            <a:pPr algn="ctr" indent="0" marL="0">
+              <a:buNone/>
+            </a:pPr>
+            <a:r>
+              <a:rPr lang="en-US" sz="1500" dirty="0">
+                <a:solidFill>
+                  <a:srgbClr val="5B6470"/>
+                </a:solidFill>
+                <a:latin typeface="PingFang TC" pitchFamily="34" charset="0"/>
+                <a:ea typeface="PingFang TC" pitchFamily="34" charset="-122"/>
+                <a:cs typeface="PingFang TC" pitchFamily="34" charset="-120"/>
+              </a:rPr>
+              <a:t>評測報告</a:t>
+            </a:r>
+            <a:endParaRPr lang="en-US" sz="1500" dirty="0"/>
+          </a:p>
+        </p:txBody>
+      </p:sp>
+      <p:sp>
+        <p:nvSpPr>
+          <p:cNvPr id="53" name="Shape 51"/>
+          <p:cNvSpPr/>
+          <p:nvPr/>
+        </p:nvSpPr>
+        <p:spPr>
+          <a:xfrm>
+            <a:off x="566928" y="5522976"/>
+            <a:ext cx="11027664" cy="932688"/>
           </a:xfrm>
           <a:prstGeom prst="roundRect">
             <a:avLst>
-              <a:gd name="adj" fmla="val 8000"/>
-            </a:avLst>
-          </a:prstGeom>
-          <a:solidFill>
-            <a:srgbClr val="F7F9FA"/>
-          </a:solidFill>
-          <a:ln w="9525">
-            <a:solidFill>
-              <a:srgbClr val="C9D3DA"/>
-            </a:solidFill>
-            <a:prstDash val="solid"/>
-          </a:ln>
-        </p:spPr>
-      </p:sp>
-      <p:sp>
-        <p:nvSpPr>
-          <p:cNvPr id="42" name="Text 40"/>
-          <p:cNvSpPr/>
-          <p:nvPr/>
-        </p:nvSpPr>
-        <p:spPr>
-          <a:xfrm>
-            <a:off x="9542678" y="4114800"/>
-            <a:ext cx="2015338" cy="457200"/>
-          </a:xfrm>
-          <a:prstGeom prst="rect">
-            <a:avLst/>
-          </a:prstGeom>
-          <a:noFill/>
-          <a:ln/>
-        </p:spPr>
-        <p:txBody>
-          <a:bodyPr wrap="square" rtlCol="0" anchor="ctr"/>
-          <a:lstStyle/>
-          <a:p>
-            <a:pPr algn="ctr" indent="0" marL="0">
-              <a:buNone/>
-            </a:pPr>
-            <a:r>
-              <a:rPr lang="en-US" sz="1500" dirty="0">
-                <a:solidFill>
-                  <a:srgbClr val="13212A"/>
-                </a:solidFill>
-                <a:latin typeface="Georgia" pitchFamily="34" charset="0"/>
-                <a:ea typeface="Georgia" pitchFamily="34" charset="-122"/>
-                <a:cs typeface="Georgia" pitchFamily="34" charset="-120"/>
-              </a:rPr>
-              <a:t>Evaluation Report</a:t>
-            </a:r>
-            <a:endParaRPr lang="en-US" sz="1500" dirty="0"/>
-          </a:p>
-        </p:txBody>
-      </p:sp>
-      <p:sp>
-        <p:nvSpPr>
-          <p:cNvPr id="43" name="Shape 41"/>
-          <p:cNvSpPr/>
-          <p:nvPr/>
-        </p:nvSpPr>
-        <p:spPr>
-          <a:xfrm>
-            <a:off x="566928" y="4791456"/>
-            <a:ext cx="11027664" cy="841248"/>
-          </a:xfrm>
-          <a:prstGeom prst="roundRect">
-            <a:avLst>
-              <a:gd name="adj" fmla="val 5435"/>
+              <a:gd name="adj" fmla="val 4902"/>
             </a:avLst>
           </a:prstGeom>
           <a:solidFill>
@@ -8317,14 +8708,14 @@
       </p:sp>
       <p:sp>
         <p:nvSpPr>
-          <p:cNvPr id="44" name="Text 42"/>
-          <p:cNvSpPr/>
-          <p:nvPr/>
-        </p:nvSpPr>
-        <p:spPr>
-          <a:xfrm>
-            <a:off x="804672" y="4864608"/>
-            <a:ext cx="2743200" cy="274320"/>
+          <p:cNvPr id="54" name="Text 52"/>
+          <p:cNvSpPr/>
+          <p:nvPr/>
+        </p:nvSpPr>
+        <p:spPr>
+          <a:xfrm>
+            <a:off x="804672" y="5577840"/>
+            <a:ext cx="2377440" cy="274320"/>
           </a:xfrm>
           <a:prstGeom prst="rect">
             <a:avLst/>
@@ -8356,14 +8747,14 @@
       </p:sp>
       <p:sp>
         <p:nvSpPr>
-          <p:cNvPr id="45" name="Text 43"/>
-          <p:cNvSpPr/>
-          <p:nvPr/>
-        </p:nvSpPr>
-        <p:spPr>
-          <a:xfrm>
-            <a:off x="804672" y="5175504"/>
-            <a:ext cx="10552176" cy="384048"/>
+          <p:cNvPr id="55" name="Text 53"/>
+          <p:cNvSpPr/>
+          <p:nvPr/>
+        </p:nvSpPr>
+        <p:spPr>
+          <a:xfrm>
+            <a:off x="804672" y="5852160"/>
+            <a:ext cx="10552176" cy="274320"/>
           </a:xfrm>
           <a:prstGeom prst="rect">
             <a:avLst/>
@@ -8387,7 +8778,7 @@
                 <a:ea typeface="Georgia" pitchFamily="34" charset="-122"/>
                 <a:cs typeface="Georgia" pitchFamily="34" charset="-120"/>
               </a:rPr>
-              <a:t>fixture/data　·　plan correctness　·　reference grounding　·　execution　·　final state　·　collateral damage　·　generated output</a:t>
+              <a:t>fixture/data · plan correctness · reference grounding · execution · final state · collateral damage · generated output</a:t>
             </a:r>
             <a:endParaRPr lang="en-US" sz="1500" dirty="0"/>
           </a:p>
@@ -8395,41 +8786,14 @@
       </p:sp>
       <p:sp>
         <p:nvSpPr>
-          <p:cNvPr id="46" name="Shape 44"/>
-          <p:cNvSpPr/>
-          <p:nvPr/>
-        </p:nvSpPr>
-        <p:spPr>
-          <a:xfrm>
-            <a:off x="566928" y="5998464"/>
-            <a:ext cx="11027664" cy="548640"/>
-          </a:xfrm>
-          <a:prstGeom prst="roundRect">
-            <a:avLst>
-              <a:gd name="adj" fmla="val 8333"/>
-            </a:avLst>
-          </a:prstGeom>
-          <a:solidFill>
-            <a:srgbClr val="EFF3F6"/>
-          </a:solidFill>
-          <a:ln w="13970">
-            <a:solidFill>
-              <a:srgbClr val="5E8F72"/>
-            </a:solidFill>
-            <a:prstDash val="solid"/>
-          </a:ln>
-        </p:spPr>
-      </p:sp>
-      <p:sp>
-        <p:nvSpPr>
-          <p:cNvPr id="47" name="Text 45"/>
-          <p:cNvSpPr/>
-          <p:nvPr/>
-        </p:nvSpPr>
-        <p:spPr>
-          <a:xfrm>
-            <a:off x="786384" y="6025896"/>
-            <a:ext cx="10588752" cy="493776"/>
+          <p:cNvPr id="56" name="Text 54"/>
+          <p:cNvSpPr/>
+          <p:nvPr/>
+        </p:nvSpPr>
+        <p:spPr>
+          <a:xfrm>
+            <a:off x="804672" y="6126480"/>
+            <a:ext cx="10552176" cy="274320"/>
           </a:xfrm>
           <a:prstGeom prst="rect">
             <a:avLst/>
@@ -8442,13 +8806,10 @@
           <a:lstStyle/>
           <a:p>
             <a:pPr indent="0" marL="0">
-              <a:lnSpc>
-                <a:spcPct val="116000"/>
-              </a:lnSpc>
-              <a:buNone/>
-            </a:pPr>
-            <a:r>
-              <a:rPr lang="en-US" sz="1500" dirty="0">
+              <a:buNone/>
+            </a:pPr>
+            <a:r>
+              <a:rPr lang="en-US" sz="1500" b="1" dirty="0">
                 <a:solidFill>
                   <a:srgbClr val="13212A"/>
                 </a:solidFill>
@@ -12432,7 +12793,7 @@
                 <a:ea typeface="PingFang TC" pitchFamily="34" charset="-122"/>
                 <a:cs typeface="PingFang TC" pitchFamily="34" charset="-120"/>
               </a:rPr>
-              <a:t>Token 與工具呼叫指標</a:t>
+              <a:t>Token &amp; Tool Uses：用量與工具呼叫指標</a:t>
             </a:r>
             <a:endParaRPr lang="en-US" sz="3000" dirty="0"/>
           </a:p>
@@ -12599,7 +12960,7 @@
                 <a:ea typeface="PingFang TC" pitchFamily="34" charset="-122"/>
                 <a:cs typeface="PingFang TC" pitchFamily="34" charset="-120"/>
               </a:rPr>
-              <a:t>Prompt total</a:t>
+              <a:t>Input tokens total</a:t>
             </a:r>
             <a:endParaRPr lang="en-US" sz="1500" dirty="0"/>
           </a:p>
@@ -12707,7 +13068,7 @@
                 <a:ea typeface="PingFang TC" pitchFamily="34" charset="-122"/>
                 <a:cs typeface="PingFang TC" pitchFamily="34" charset="-120"/>
               </a:rPr>
-              <a:t>Completion total</a:t>
+              <a:t>Output tokens total</a:t>
             </a:r>
             <a:endParaRPr lang="en-US" sz="1500" dirty="0"/>
           </a:p>
@@ -12923,7 +13284,7 @@
                 <a:ea typeface="PingFang TC" pitchFamily="34" charset="-122"/>
                 <a:cs typeface="PingFang TC" pitchFamily="34" charset="-120"/>
               </a:rPr>
-              <a:t>Average total / run</a:t>
+              <a:t>Average tokens / run</a:t>
             </a:r>
             <a:endParaRPr lang="en-US" sz="1500" dirty="0"/>
           </a:p>
@@ -12962,7 +13323,7 @@
                 <a:ea typeface="PingFang TC" pitchFamily="34" charset="-122"/>
                 <a:cs typeface="PingFang TC" pitchFamily="34" charset="-120"/>
               </a:rPr>
-              <a:t>各層平均 token</a:t>
+              <a:t>Average tokens by EC tier</a:t>
             </a:r>
             <a:endParaRPr lang="en-US" sz="1700" dirty="0"/>
           </a:p>
@@ -13473,7 +13834,7 @@
                 <a:ea typeface="PingFang TC" pitchFamily="34" charset="-122"/>
                 <a:cs typeface="PingFang TC" pitchFamily="34" charset="-120"/>
               </a:rPr>
-              <a:t>各層平均工具步數</a:t>
+              <a:t>Average tool uses（各層平均工具呼叫次數）</a:t>
             </a:r>
             <a:endParaRPr lang="en-US" sz="1700" dirty="0"/>
           </a:p>
@@ -13994,7 +14355,7 @@
                 <a:ea typeface="PingFang TC" pitchFamily="34" charset="-122"/>
                 <a:cs typeface="PingFang TC" pitchFamily="34" charset="-120"/>
               </a:rPr>
-              <a:t>EC3 為生成技能測試，不走工具呼叫路徑，故無工具步數；它的 token 也最低（1447），因為輸出是程式碼而非多輪工具規劃。</a:t>
+              <a:t>EC3 為生成技能測試，不走工具呼叫路徑，故無工具次數；它的 token 也最低（1447），因為輸出是程式碼而非多輪工具規劃。</a:t>
             </a:r>
             <a:endParaRPr lang="en-US" sz="1500" dirty="0"/>
           </a:p>
@@ -39061,12 +39422,12 @@
         </p:nvSpPr>
         <p:spPr>
           <a:xfrm>
-            <a:off x="566928" y="1280160"/>
-            <a:ext cx="11027664" cy="859536"/>
+            <a:off x="566928" y="1261872"/>
+            <a:ext cx="11027664" cy="786384"/>
           </a:xfrm>
           <a:prstGeom prst="roundRect">
             <a:avLst>
-              <a:gd name="adj" fmla="val 5319"/>
+              <a:gd name="adj" fmla="val 5814"/>
             </a:avLst>
           </a:prstGeom>
           <a:solidFill>
@@ -39083,8 +39444,8 @@
         </p:nvSpPr>
         <p:spPr>
           <a:xfrm>
-            <a:off x="841248" y="1371600"/>
-            <a:ext cx="1828800" cy="237744"/>
+            <a:off x="841248" y="1335024"/>
+            <a:ext cx="1828800" cy="219456"/>
           </a:xfrm>
           <a:prstGeom prst="rect">
             <a:avLst/>
@@ -39122,8 +39483,8 @@
         </p:nvSpPr>
         <p:spPr>
           <a:xfrm>
-            <a:off x="841248" y="1627632"/>
-            <a:ext cx="10479024" cy="365760"/>
+            <a:off x="841248" y="1554480"/>
+            <a:ext cx="10479024" cy="347472"/>
           </a:xfrm>
           <a:prstGeom prst="rect">
             <a:avLst/>
@@ -39155,24 +39516,63 @@
       </p:sp>
       <p:sp>
         <p:nvSpPr>
-          <p:cNvPr id="9" name="Shape 7"/>
-          <p:cNvSpPr/>
-          <p:nvPr/>
-        </p:nvSpPr>
-        <p:spPr>
-          <a:xfrm>
-            <a:off x="566928" y="2340864"/>
-            <a:ext cx="2468880" cy="1371600"/>
+          <p:cNvPr id="9" name="Text 7"/>
+          <p:cNvSpPr/>
+          <p:nvPr/>
+        </p:nvSpPr>
+        <p:spPr>
+          <a:xfrm>
+            <a:off x="566928" y="2176272"/>
+            <a:ext cx="2743200" cy="256032"/>
+          </a:xfrm>
+          <a:prstGeom prst="rect">
+            <a:avLst/>
+          </a:prstGeom>
+          <a:noFill/>
+          <a:ln/>
+        </p:spPr>
+        <p:txBody>
+          <a:bodyPr wrap="square" rtlCol="0" anchor="ctr"/>
+          <a:lstStyle/>
+          <a:p>
+            <a:pPr indent="0" marL="0">
+              <a:buNone/>
+            </a:pPr>
+            <a:r>
+              <a:rPr lang="en-US" sz="1700" b="1" dirty="0">
+                <a:solidFill>
+                  <a:srgbClr val="13212A"/>
+                </a:solidFill>
+                <a:latin typeface="PingFang TC" pitchFamily="34" charset="0"/>
+                <a:ea typeface="PingFang TC" pitchFamily="34" charset="-122"/>
+                <a:cs typeface="PingFang TC" pitchFamily="34" charset="-120"/>
+              </a:rPr>
+              <a:t>設計流程</a:t>
+            </a:r>
+            <a:endParaRPr lang="en-US" sz="1700" dirty="0"/>
+          </a:p>
+        </p:txBody>
+      </p:sp>
+      <p:sp>
+        <p:nvSpPr>
+          <p:cNvPr id="10" name="Shape 8"/>
+          <p:cNvSpPr/>
+          <p:nvPr/>
+        </p:nvSpPr>
+        <p:spPr>
+          <a:xfrm>
+            <a:off x="566928" y="2487168"/>
+            <a:ext cx="2059229" cy="2395728"/>
           </a:xfrm>
           <a:prstGeom prst="roundRect">
             <a:avLst>
-              <a:gd name="adj" fmla="val 3333"/>
+              <a:gd name="adj" fmla="val 2220"/>
             </a:avLst>
           </a:prstGeom>
           <a:solidFill>
             <a:srgbClr val="F7F9FA"/>
           </a:solidFill>
-          <a:ln w="17780">
+          <a:ln w="16510">
             <a:solidFill>
               <a:srgbClr val="C9A94E"/>
             </a:solidFill>
@@ -39182,14 +39582,34 @@
       </p:sp>
       <p:sp>
         <p:nvSpPr>
-          <p:cNvPr id="10" name="Text 8"/>
-          <p:cNvSpPr/>
-          <p:nvPr/>
-        </p:nvSpPr>
-        <p:spPr>
-          <a:xfrm>
-            <a:off x="658368" y="2468880"/>
-            <a:ext cx="2286000" cy="512064"/>
+          <p:cNvPr id="11" name="Shape 9"/>
+          <p:cNvSpPr/>
+          <p:nvPr/>
+        </p:nvSpPr>
+        <p:spPr>
+          <a:xfrm>
+            <a:off x="566928" y="2487168"/>
+            <a:ext cx="2059229" cy="45720"/>
+          </a:xfrm>
+          <a:prstGeom prst="rect">
+            <a:avLst/>
+          </a:prstGeom>
+          <a:solidFill>
+            <a:srgbClr val="C9A94E"/>
+          </a:solidFill>
+          <a:ln/>
+        </p:spPr>
+      </p:sp>
+      <p:sp>
+        <p:nvSpPr>
+          <p:cNvPr id="12" name="Text 10"/>
+          <p:cNvSpPr/>
+          <p:nvPr/>
+        </p:nvSpPr>
+        <p:spPr>
+          <a:xfrm>
+            <a:off x="658368" y="2615184"/>
+            <a:ext cx="1876349" cy="512064"/>
           </a:xfrm>
           <a:prstGeom prst="rect">
             <a:avLst/>
@@ -39203,12 +39623,12 @@
           <a:p>
             <a:pPr algn="ctr" indent="0" marL="0">
               <a:lnSpc>
-                <a:spcPct val="108000"/>
+                <a:spcPct val="106000"/>
               </a:lnSpc>
               <a:buNone/>
             </a:pPr>
             <a:r>
-              <a:rPr lang="en-US" sz="1700" b="1" dirty="0">
+              <a:rPr lang="en-US" sz="1500" b="1" dirty="0">
                 <a:solidFill>
                   <a:srgbClr val="C9A94E"/>
                 </a:solidFill>
@@ -39218,20 +39638,59 @@
               </a:rPr>
               <a:t>User Request</a:t>
             </a:r>
-            <a:endParaRPr lang="en-US" sz="1700" dirty="0"/>
-          </a:p>
-        </p:txBody>
-      </p:sp>
-      <p:sp>
-        <p:nvSpPr>
-          <p:cNvPr id="11" name="Text 9"/>
-          <p:cNvSpPr/>
-          <p:nvPr/>
-        </p:nvSpPr>
-        <p:spPr>
-          <a:xfrm>
-            <a:off x="658368" y="3017520"/>
-            <a:ext cx="2286000" cy="585216"/>
+            <a:endParaRPr lang="en-US" sz="1500" dirty="0"/>
+          </a:p>
+        </p:txBody>
+      </p:sp>
+      <p:sp>
+        <p:nvSpPr>
+          <p:cNvPr id="13" name="Text 11"/>
+          <p:cNvSpPr/>
+          <p:nvPr/>
+        </p:nvSpPr>
+        <p:spPr>
+          <a:xfrm>
+            <a:off x="658368" y="3145536"/>
+            <a:ext cx="1876349" cy="274320"/>
+          </a:xfrm>
+          <a:prstGeom prst="rect">
+            <a:avLst/>
+          </a:prstGeom>
+          <a:noFill/>
+          <a:ln/>
+        </p:spPr>
+        <p:txBody>
+          <a:bodyPr wrap="square" rtlCol="0" anchor="ctr"/>
+          <a:lstStyle/>
+          <a:p>
+            <a:pPr algn="ctr" indent="0" marL="0">
+              <a:buNone/>
+            </a:pPr>
+            <a:r>
+              <a:rPr lang="en-US" sz="1500" b="1" dirty="0">
+                <a:solidFill>
+                  <a:srgbClr val="13212A"/>
+                </a:solidFill>
+                <a:latin typeface="PingFang TC" pitchFamily="34" charset="0"/>
+                <a:ea typeface="PingFang TC" pitchFamily="34" charset="-122"/>
+                <a:cs typeface="PingFang TC" pitchFamily="34" charset="-120"/>
+              </a:rPr>
+              <a:t>自然語言需求</a:t>
+            </a:r>
+            <a:endParaRPr lang="en-US" sz="1500" dirty="0"/>
+          </a:p>
+        </p:txBody>
+      </p:sp>
+      <p:sp>
+        <p:nvSpPr>
+          <p:cNvPr id="14" name="Text 12"/>
+          <p:cNvSpPr/>
+          <p:nvPr/>
+        </p:nvSpPr>
+        <p:spPr>
+          <a:xfrm>
+            <a:off x="694944" y="3474720"/>
+            <a:ext cx="1803197" cy="1316736"/>
           </a:xfrm>
           <a:prstGeom prst="rect">
             <a:avLst/>
@@ -39243,11 +39702,12 @@
           <a:bodyPr wrap="square" rtlCol="0" anchor="t"/>
           <a:lstStyle/>
           <a:p>
-            <a:pPr algn="ctr" indent="0" marL="0">
+            <a:pPr marL="342900" indent="-342900">
               <a:lnSpc>
                 <a:spcPct val="114000"/>
               </a:lnSpc>
-              <a:buNone/>
+              <a:buSzPct val="100000"/>
+              <a:buChar char="•"/>
             </a:pPr>
             <a:r>
               <a:rPr lang="en-US" sz="1500" dirty="0">
@@ -39258,71 +39718,92 @@
                 <a:ea typeface="PingFang TC" pitchFamily="34" charset="-122"/>
                 <a:cs typeface="PingFang TC" pitchFamily="34" charset="-120"/>
               </a:rPr>
-              <a:t>自然語言需求</a:t>
+              <a:t>需求可能模糊</a:t>
             </a:r>
             <a:endParaRPr lang="en-US" sz="1500" dirty="0"/>
           </a:p>
-        </p:txBody>
-      </p:sp>
-      <p:sp>
-        <p:nvSpPr>
-          <p:cNvPr id="12" name="Text 10"/>
-          <p:cNvSpPr/>
-          <p:nvPr/>
-        </p:nvSpPr>
-        <p:spPr>
-          <a:xfrm>
-            <a:off x="3054096" y="2843784"/>
-            <a:ext cx="347472" cy="365760"/>
-          </a:xfrm>
-          <a:prstGeom prst="rect">
-            <a:avLst/>
-          </a:prstGeom>
-          <a:noFill/>
-          <a:ln/>
-        </p:spPr>
-        <p:txBody>
-          <a:bodyPr wrap="square" rtlCol="0" anchor="ctr"/>
-          <a:lstStyle/>
-          <a:p>
-            <a:pPr algn="ctr" indent="0" marL="0">
-              <a:buNone/>
-            </a:pPr>
-            <a:r>
-              <a:rPr lang="en-US" sz="1600" dirty="0">
-                <a:solidFill>
-                  <a:srgbClr val="C9D3DA"/>
+          <a:p>
+            <a:pPr marL="342900" indent="-342900">
+              <a:lnSpc>
+                <a:spcPct val="114000"/>
+              </a:lnSpc>
+              <a:buSzPct val="100000"/>
+              <a:buChar char="•"/>
+            </a:pPr>
+            <a:r>
+              <a:rPr lang="en-US" sz="1500" dirty="0">
+                <a:solidFill>
+                  <a:srgbClr val="5B6470"/>
                 </a:solidFill>
                 <a:latin typeface="PingFang TC" pitchFamily="34" charset="0"/>
                 <a:ea typeface="PingFang TC" pitchFamily="34" charset="-122"/>
                 <a:cs typeface="PingFang TC" pitchFamily="34" charset="-120"/>
               </a:rPr>
+              <a:t>不可直接操作資料</a:t>
+            </a:r>
+            <a:endParaRPr lang="en-US" sz="1500" dirty="0"/>
+          </a:p>
+        </p:txBody>
+      </p:sp>
+      <p:sp>
+        <p:nvSpPr>
+          <p:cNvPr id="15" name="Text 13"/>
+          <p:cNvSpPr/>
+          <p:nvPr/>
+        </p:nvSpPr>
+        <p:spPr>
+          <a:xfrm>
+            <a:off x="2635301" y="3383280"/>
+            <a:ext cx="164592" cy="365760"/>
+          </a:xfrm>
+          <a:prstGeom prst="rect">
+            <a:avLst/>
+          </a:prstGeom>
+          <a:noFill/>
+          <a:ln/>
+        </p:spPr>
+        <p:txBody>
+          <a:bodyPr wrap="square" rtlCol="0" anchor="ctr"/>
+          <a:lstStyle/>
+          <a:p>
+            <a:pPr algn="ctr" indent="0" marL="0">
+              <a:buNone/>
+            </a:pPr>
+            <a:r>
+              <a:rPr lang="en-US" sz="1300" dirty="0">
+                <a:solidFill>
+                  <a:srgbClr val="C9D3DA"/>
+                </a:solidFill>
+                <a:latin typeface="PingFang TC" pitchFamily="34" charset="0"/>
+                <a:ea typeface="PingFang TC" pitchFamily="34" charset="-122"/>
+                <a:cs typeface="PingFang TC" pitchFamily="34" charset="-120"/>
+              </a:rPr>
               <a:t>▶</a:t>
             </a:r>
-            <a:endParaRPr lang="en-US" sz="1600" dirty="0"/>
-          </a:p>
-        </p:txBody>
-      </p:sp>
-      <p:sp>
-        <p:nvSpPr>
-          <p:cNvPr id="13" name="Shape 11"/>
-          <p:cNvSpPr/>
-          <p:nvPr/>
-        </p:nvSpPr>
-        <p:spPr>
-          <a:xfrm>
-            <a:off x="3419856" y="2340864"/>
-            <a:ext cx="2468880" cy="1371600"/>
+            <a:endParaRPr lang="en-US" sz="1300" dirty="0"/>
+          </a:p>
+        </p:txBody>
+      </p:sp>
+      <p:sp>
+        <p:nvSpPr>
+          <p:cNvPr id="16" name="Shape 14"/>
+          <p:cNvSpPr/>
+          <p:nvPr/>
+        </p:nvSpPr>
+        <p:spPr>
+          <a:xfrm>
+            <a:off x="2809037" y="2487168"/>
+            <a:ext cx="2059229" cy="2395728"/>
           </a:xfrm>
           <a:prstGeom prst="roundRect">
             <a:avLst>
-              <a:gd name="adj" fmla="val 3333"/>
+              <a:gd name="adj" fmla="val 2220"/>
             </a:avLst>
           </a:prstGeom>
           <a:solidFill>
             <a:srgbClr val="F7F9FA"/>
           </a:solidFill>
-          <a:ln w="17780">
+          <a:ln w="16510">
             <a:solidFill>
               <a:srgbClr val="2F6F8F"/>
             </a:solidFill>
@@ -39332,14 +39813,34 @@
       </p:sp>
       <p:sp>
         <p:nvSpPr>
-          <p:cNvPr id="14" name="Text 12"/>
-          <p:cNvSpPr/>
-          <p:nvPr/>
-        </p:nvSpPr>
-        <p:spPr>
-          <a:xfrm>
-            <a:off x="3511296" y="2468880"/>
-            <a:ext cx="2286000" cy="512064"/>
+          <p:cNvPr id="17" name="Shape 15"/>
+          <p:cNvSpPr/>
+          <p:nvPr/>
+        </p:nvSpPr>
+        <p:spPr>
+          <a:xfrm>
+            <a:off x="2809037" y="2487168"/>
+            <a:ext cx="2059229" cy="45720"/>
+          </a:xfrm>
+          <a:prstGeom prst="rect">
+            <a:avLst/>
+          </a:prstGeom>
+          <a:solidFill>
+            <a:srgbClr val="2F6F8F"/>
+          </a:solidFill>
+          <a:ln/>
+        </p:spPr>
+      </p:sp>
+      <p:sp>
+        <p:nvSpPr>
+          <p:cNvPr id="18" name="Text 16"/>
+          <p:cNvSpPr/>
+          <p:nvPr/>
+        </p:nvSpPr>
+        <p:spPr>
+          <a:xfrm>
+            <a:off x="2900477" y="2615184"/>
+            <a:ext cx="1876349" cy="512064"/>
           </a:xfrm>
           <a:prstGeom prst="rect">
             <a:avLst/>
@@ -39353,12 +39854,12 @@
           <a:p>
             <a:pPr algn="ctr" indent="0" marL="0">
               <a:lnSpc>
-                <a:spcPct val="108000"/>
+                <a:spcPct val="106000"/>
               </a:lnSpc>
               <a:buNone/>
             </a:pPr>
             <a:r>
-              <a:rPr lang="en-US" sz="1700" b="1" dirty="0">
+              <a:rPr lang="en-US" sz="1500" b="1" dirty="0">
                 <a:solidFill>
                   <a:srgbClr val="2F6F8F"/>
                 </a:solidFill>
@@ -39366,22 +39867,81 @@
                 <a:ea typeface="Georgia" pitchFamily="34" charset="-122"/>
                 <a:cs typeface="Georgia" pitchFamily="34" charset="-120"/>
               </a:rPr>
-              <a:t>Structured Workflow</a:t>
-            </a:r>
-            <a:endParaRPr lang="en-US" sz="1700" dirty="0"/>
-          </a:p>
-        </p:txBody>
-      </p:sp>
-      <p:sp>
-        <p:nvSpPr>
-          <p:cNvPr id="15" name="Text 13"/>
-          <p:cNvSpPr/>
-          <p:nvPr/>
-        </p:nvSpPr>
-        <p:spPr>
-          <a:xfrm>
-            <a:off x="3511296" y="3017520"/>
-            <a:ext cx="2286000" cy="585216"/>
+              <a:t>Structured</a:t>
+            </a:r>
+            <a:endParaRPr lang="en-US" sz="1500" dirty="0"/>
+          </a:p>
+          <a:p>
+            <a:pPr algn="ctr" indent="0" marL="0">
+              <a:lnSpc>
+                <a:spcPct val="106000"/>
+              </a:lnSpc>
+              <a:buNone/>
+            </a:pPr>
+            <a:r>
+              <a:rPr lang="en-US" sz="1500" b="1" dirty="0">
+                <a:solidFill>
+                  <a:srgbClr val="2F6F8F"/>
+                </a:solidFill>
+                <a:latin typeface="Georgia" pitchFamily="34" charset="0"/>
+                <a:ea typeface="Georgia" pitchFamily="34" charset="-122"/>
+                <a:cs typeface="Georgia" pitchFamily="34" charset="-120"/>
+              </a:rPr>
+              <a:t>Workflow</a:t>
+            </a:r>
+            <a:endParaRPr lang="en-US" sz="1500" dirty="0"/>
+          </a:p>
+        </p:txBody>
+      </p:sp>
+      <p:sp>
+        <p:nvSpPr>
+          <p:cNvPr id="19" name="Text 17"/>
+          <p:cNvSpPr/>
+          <p:nvPr/>
+        </p:nvSpPr>
+        <p:spPr>
+          <a:xfrm>
+            <a:off x="2900477" y="3145536"/>
+            <a:ext cx="1876349" cy="274320"/>
+          </a:xfrm>
+          <a:prstGeom prst="rect">
+            <a:avLst/>
+          </a:prstGeom>
+          <a:noFill/>
+          <a:ln/>
+        </p:spPr>
+        <p:txBody>
+          <a:bodyPr wrap="square" rtlCol="0" anchor="ctr"/>
+          <a:lstStyle/>
+          <a:p>
+            <a:pPr algn="ctr" indent="0" marL="0">
+              <a:buNone/>
+            </a:pPr>
+            <a:r>
+              <a:rPr lang="en-US" sz="1500" b="1" dirty="0">
+                <a:solidFill>
+                  <a:srgbClr val="13212A"/>
+                </a:solidFill>
+                <a:latin typeface="PingFang TC" pitchFamily="34" charset="0"/>
+                <a:ea typeface="PingFang TC" pitchFamily="34" charset="-122"/>
+                <a:cs typeface="PingFang TC" pitchFamily="34" charset="-120"/>
+              </a:rPr>
+              <a:t>轉成可檢查的計畫</a:t>
+            </a:r>
+            <a:endParaRPr lang="en-US" sz="1500" dirty="0"/>
+          </a:p>
+        </p:txBody>
+      </p:sp>
+      <p:sp>
+        <p:nvSpPr>
+          <p:cNvPr id="20" name="Text 18"/>
+          <p:cNvSpPr/>
+          <p:nvPr/>
+        </p:nvSpPr>
+        <p:spPr>
+          <a:xfrm>
+            <a:off x="2937053" y="3474720"/>
+            <a:ext cx="1803197" cy="1316736"/>
           </a:xfrm>
           <a:prstGeom prst="rect">
             <a:avLst/>
@@ -39393,11 +39953,12 @@
           <a:bodyPr wrap="square" rtlCol="0" anchor="t"/>
           <a:lstStyle/>
           <a:p>
-            <a:pPr algn="ctr" indent="0" marL="0">
+            <a:pPr marL="342900" indent="-342900">
               <a:lnSpc>
                 <a:spcPct val="114000"/>
               </a:lnSpc>
-              <a:buNone/>
+              <a:buSzPct val="100000"/>
+              <a:buChar char="•"/>
             </a:pPr>
             <a:r>
               <a:rPr lang="en-US" sz="1500" dirty="0">
@@ -39408,71 +39969,385 @@
                 <a:ea typeface="PingFang TC" pitchFamily="34" charset="-122"/>
                 <a:cs typeface="PingFang TC" pitchFamily="34" charset="-120"/>
               </a:rPr>
-              <a:t>JSON plan · schema · registry</a:t>
+              <a:t>JSON plan</a:t>
             </a:r>
             <a:endParaRPr lang="en-US" sz="1500" dirty="0"/>
           </a:p>
-        </p:txBody>
-      </p:sp>
-      <p:sp>
-        <p:nvSpPr>
-          <p:cNvPr id="16" name="Text 14"/>
-          <p:cNvSpPr/>
-          <p:nvPr/>
-        </p:nvSpPr>
-        <p:spPr>
-          <a:xfrm>
-            <a:off x="5907024" y="2843784"/>
-            <a:ext cx="347472" cy="365760"/>
-          </a:xfrm>
-          <a:prstGeom prst="rect">
-            <a:avLst/>
-          </a:prstGeom>
-          <a:noFill/>
-          <a:ln/>
-        </p:spPr>
-        <p:txBody>
-          <a:bodyPr wrap="square" rtlCol="0" anchor="ctr"/>
-          <a:lstStyle/>
-          <a:p>
-            <a:pPr algn="ctr" indent="0" marL="0">
-              <a:buNone/>
-            </a:pPr>
-            <a:r>
-              <a:rPr lang="en-US" sz="1600" dirty="0">
-                <a:solidFill>
-                  <a:srgbClr val="C9D3DA"/>
+          <a:p>
+            <a:pPr marL="342900" indent="-342900">
+              <a:lnSpc>
+                <a:spcPct val="114000"/>
+              </a:lnSpc>
+              <a:buSzPct val="100000"/>
+              <a:buChar char="•"/>
+            </a:pPr>
+            <a:r>
+              <a:rPr lang="en-US" sz="1500" dirty="0">
+                <a:solidFill>
+                  <a:srgbClr val="5B6470"/>
                 </a:solidFill>
                 <a:latin typeface="PingFang TC" pitchFamily="34" charset="0"/>
                 <a:ea typeface="PingFang TC" pitchFamily="34" charset="-122"/>
                 <a:cs typeface="PingFang TC" pitchFamily="34" charset="-120"/>
               </a:rPr>
+              <a:t>Schema 驗證</a:t>
+            </a:r>
+            <a:endParaRPr lang="en-US" sz="1500" dirty="0"/>
+          </a:p>
+          <a:p>
+            <a:pPr marL="342900" indent="-342900">
+              <a:lnSpc>
+                <a:spcPct val="114000"/>
+              </a:lnSpc>
+              <a:buSzPct val="100000"/>
+              <a:buChar char="•"/>
+            </a:pPr>
+            <a:r>
+              <a:rPr lang="en-US" sz="1500" dirty="0">
+                <a:solidFill>
+                  <a:srgbClr val="5B6470"/>
+                </a:solidFill>
+                <a:latin typeface="PingFang TC" pitchFamily="34" charset="0"/>
+                <a:ea typeface="PingFang TC" pitchFamily="34" charset="-122"/>
+                <a:cs typeface="PingFang TC" pitchFamily="34" charset="-120"/>
+              </a:rPr>
+              <a:t>Registry 工具／技能</a:t>
+            </a:r>
+            <a:endParaRPr lang="en-US" sz="1500" dirty="0"/>
+          </a:p>
+        </p:txBody>
+      </p:sp>
+      <p:sp>
+        <p:nvSpPr>
+          <p:cNvPr id="21" name="Text 19"/>
+          <p:cNvSpPr/>
+          <p:nvPr/>
+        </p:nvSpPr>
+        <p:spPr>
+          <a:xfrm>
+            <a:off x="4877410" y="3383280"/>
+            <a:ext cx="164592" cy="365760"/>
+          </a:xfrm>
+          <a:prstGeom prst="rect">
+            <a:avLst/>
+          </a:prstGeom>
+          <a:noFill/>
+          <a:ln/>
+        </p:spPr>
+        <p:txBody>
+          <a:bodyPr wrap="square" rtlCol="0" anchor="ctr"/>
+          <a:lstStyle/>
+          <a:p>
+            <a:pPr algn="ctr" indent="0" marL="0">
+              <a:buNone/>
+            </a:pPr>
+            <a:r>
+              <a:rPr lang="en-US" sz="1300" dirty="0">
+                <a:solidFill>
+                  <a:srgbClr val="C9D3DA"/>
+                </a:solidFill>
+                <a:latin typeface="PingFang TC" pitchFamily="34" charset="0"/>
+                <a:ea typeface="PingFang TC" pitchFamily="34" charset="-122"/>
+                <a:cs typeface="PingFang TC" pitchFamily="34" charset="-120"/>
+              </a:rPr>
               <a:t>▶</a:t>
             </a:r>
-            <a:endParaRPr lang="en-US" sz="1600" dirty="0"/>
-          </a:p>
-        </p:txBody>
-      </p:sp>
-      <p:sp>
-        <p:nvSpPr>
-          <p:cNvPr id="17" name="Shape 15"/>
-          <p:cNvSpPr/>
-          <p:nvPr/>
-        </p:nvSpPr>
-        <p:spPr>
-          <a:xfrm>
-            <a:off x="6272784" y="2340864"/>
-            <a:ext cx="2468880" cy="1371600"/>
+            <a:endParaRPr lang="en-US" sz="1300" dirty="0"/>
+          </a:p>
+        </p:txBody>
+      </p:sp>
+      <p:sp>
+        <p:nvSpPr>
+          <p:cNvPr id="22" name="Shape 20"/>
+          <p:cNvSpPr/>
+          <p:nvPr/>
+        </p:nvSpPr>
+        <p:spPr>
+          <a:xfrm>
+            <a:off x="5051146" y="2487168"/>
+            <a:ext cx="2059229" cy="2395728"/>
           </a:xfrm>
           <a:prstGeom prst="roundRect">
             <a:avLst>
-              <a:gd name="adj" fmla="val 3333"/>
+              <a:gd name="adj" fmla="val 2220"/>
             </a:avLst>
           </a:prstGeom>
           <a:solidFill>
             <a:srgbClr val="F7F9FA"/>
           </a:solidFill>
-          <a:ln w="17780">
+          <a:ln w="16510">
+            <a:solidFill>
+              <a:srgbClr val="B06A66"/>
+            </a:solidFill>
+            <a:prstDash val="solid"/>
+          </a:ln>
+        </p:spPr>
+      </p:sp>
+      <p:sp>
+        <p:nvSpPr>
+          <p:cNvPr id="23" name="Shape 21"/>
+          <p:cNvSpPr/>
+          <p:nvPr/>
+        </p:nvSpPr>
+        <p:spPr>
+          <a:xfrm>
+            <a:off x="5051146" y="2487168"/>
+            <a:ext cx="2059229" cy="45720"/>
+          </a:xfrm>
+          <a:prstGeom prst="rect">
+            <a:avLst/>
+          </a:prstGeom>
+          <a:solidFill>
+            <a:srgbClr val="B06A66"/>
+          </a:solidFill>
+          <a:ln/>
+        </p:spPr>
+      </p:sp>
+      <p:sp>
+        <p:nvSpPr>
+          <p:cNvPr id="24" name="Text 22"/>
+          <p:cNvSpPr/>
+          <p:nvPr/>
+        </p:nvSpPr>
+        <p:spPr>
+          <a:xfrm>
+            <a:off x="5142586" y="2615184"/>
+            <a:ext cx="1876349" cy="512064"/>
+          </a:xfrm>
+          <a:prstGeom prst="rect">
+            <a:avLst/>
+          </a:prstGeom>
+          <a:noFill/>
+          <a:ln/>
+        </p:spPr>
+        <p:txBody>
+          <a:bodyPr wrap="square" rtlCol="0" anchor="ctr"/>
+          <a:lstStyle/>
+          <a:p>
+            <a:pPr algn="ctr" indent="0" marL="0">
+              <a:lnSpc>
+                <a:spcPct val="106000"/>
+              </a:lnSpc>
+              <a:buNone/>
+            </a:pPr>
+            <a:r>
+              <a:rPr lang="en-US" sz="1500" b="1" dirty="0">
+                <a:solidFill>
+                  <a:srgbClr val="B06A66"/>
+                </a:solidFill>
+                <a:latin typeface="Georgia" pitchFamily="34" charset="0"/>
+                <a:ea typeface="Georgia" pitchFamily="34" charset="-122"/>
+                <a:cs typeface="Georgia" pitchFamily="34" charset="-120"/>
+              </a:rPr>
+              <a:t>Permission</a:t>
+            </a:r>
+            <a:endParaRPr lang="en-US" sz="1500" dirty="0"/>
+          </a:p>
+          <a:p>
+            <a:pPr algn="ctr" indent="0" marL="0">
+              <a:lnSpc>
+                <a:spcPct val="106000"/>
+              </a:lnSpc>
+              <a:buNone/>
+            </a:pPr>
+            <a:r>
+              <a:rPr lang="en-US" sz="1500" b="1" dirty="0">
+                <a:solidFill>
+                  <a:srgbClr val="B06A66"/>
+                </a:solidFill>
+                <a:latin typeface="Georgia" pitchFamily="34" charset="0"/>
+                <a:ea typeface="Georgia" pitchFamily="34" charset="-122"/>
+                <a:cs typeface="Georgia" pitchFamily="34" charset="-120"/>
+              </a:rPr>
+              <a:t>Review</a:t>
+            </a:r>
+            <a:endParaRPr lang="en-US" sz="1500" dirty="0"/>
+          </a:p>
+        </p:txBody>
+      </p:sp>
+      <p:sp>
+        <p:nvSpPr>
+          <p:cNvPr id="25" name="Text 23"/>
+          <p:cNvSpPr/>
+          <p:nvPr/>
+        </p:nvSpPr>
+        <p:spPr>
+          <a:xfrm>
+            <a:off x="5142586" y="3145536"/>
+            <a:ext cx="1876349" cy="274320"/>
+          </a:xfrm>
+          <a:prstGeom prst="rect">
+            <a:avLst/>
+          </a:prstGeom>
+          <a:noFill/>
+          <a:ln/>
+        </p:spPr>
+        <p:txBody>
+          <a:bodyPr wrap="square" rtlCol="0" anchor="ctr"/>
+          <a:lstStyle/>
+          <a:p>
+            <a:pPr algn="ctr" indent="0" marL="0">
+              <a:buNone/>
+            </a:pPr>
+            <a:r>
+              <a:rPr lang="en-US" sz="1500" b="1" dirty="0">
+                <a:solidFill>
+                  <a:srgbClr val="13212A"/>
+                </a:solidFill>
+                <a:latin typeface="PingFang TC" pitchFamily="34" charset="0"/>
+                <a:ea typeface="PingFang TC" pitchFamily="34" charset="-122"/>
+                <a:cs typeface="PingFang TC" pitchFamily="34" charset="-120"/>
+              </a:rPr>
+              <a:t>權限與風險檢查</a:t>
+            </a:r>
+            <a:endParaRPr lang="en-US" sz="1500" dirty="0"/>
+          </a:p>
+        </p:txBody>
+      </p:sp>
+      <p:sp>
+        <p:nvSpPr>
+          <p:cNvPr id="26" name="Text 24"/>
+          <p:cNvSpPr/>
+          <p:nvPr/>
+        </p:nvSpPr>
+        <p:spPr>
+          <a:xfrm>
+            <a:off x="5179162" y="3474720"/>
+            <a:ext cx="1803197" cy="1316736"/>
+          </a:xfrm>
+          <a:prstGeom prst="rect">
+            <a:avLst/>
+          </a:prstGeom>
+          <a:noFill/>
+          <a:ln/>
+        </p:spPr>
+        <p:txBody>
+          <a:bodyPr wrap="square" rtlCol="0" anchor="t"/>
+          <a:lstStyle/>
+          <a:p>
+            <a:pPr marL="342900" indent="-342900">
+              <a:lnSpc>
+                <a:spcPct val="114000"/>
+              </a:lnSpc>
+              <a:buSzPct val="100000"/>
+              <a:buChar char="•"/>
+            </a:pPr>
+            <a:r>
+              <a:rPr lang="en-US" sz="1500" dirty="0">
+                <a:solidFill>
+                  <a:srgbClr val="5B6470"/>
+                </a:solidFill>
+                <a:latin typeface="PingFang TC" pitchFamily="34" charset="0"/>
+                <a:ea typeface="PingFang TC" pitchFamily="34" charset="-122"/>
+                <a:cs typeface="PingFang TC" pitchFamily="34" charset="-120"/>
+              </a:rPr>
+              <a:t>權限檢查</a:t>
+            </a:r>
+            <a:endParaRPr lang="en-US" sz="1500" dirty="0"/>
+          </a:p>
+          <a:p>
+            <a:pPr marL="342900" indent="-342900">
+              <a:lnSpc>
+                <a:spcPct val="114000"/>
+              </a:lnSpc>
+              <a:buSzPct val="100000"/>
+              <a:buChar char="•"/>
+            </a:pPr>
+            <a:r>
+              <a:rPr lang="en-US" sz="1500" dirty="0">
+                <a:solidFill>
+                  <a:srgbClr val="5B6470"/>
+                </a:solidFill>
+                <a:latin typeface="PingFang TC" pitchFamily="34" charset="0"/>
+                <a:ea typeface="PingFang TC" pitchFamily="34" charset="-122"/>
+                <a:cs typeface="PingFang TC" pitchFamily="34" charset="-120"/>
+              </a:rPr>
+              <a:t>高風險操作判定</a:t>
+            </a:r>
+            <a:endParaRPr lang="en-US" sz="1500" dirty="0"/>
+          </a:p>
+          <a:p>
+            <a:pPr marL="342900" indent="-342900">
+              <a:lnSpc>
+                <a:spcPct val="114000"/>
+              </a:lnSpc>
+              <a:buSzPct val="100000"/>
+              <a:buChar char="•"/>
+            </a:pPr>
+            <a:r>
+              <a:rPr lang="en-US" sz="1500" dirty="0">
+                <a:solidFill>
+                  <a:srgbClr val="5B6470"/>
+                </a:solidFill>
+                <a:latin typeface="PingFang TC" pitchFamily="34" charset="0"/>
+                <a:ea typeface="PingFang TC" pitchFamily="34" charset="-122"/>
+                <a:cs typeface="PingFang TC" pitchFamily="34" charset="-120"/>
+              </a:rPr>
+              <a:t>是否需要人工核可</a:t>
+            </a:r>
+            <a:endParaRPr lang="en-US" sz="1500" dirty="0"/>
+          </a:p>
+        </p:txBody>
+      </p:sp>
+      <p:sp>
+        <p:nvSpPr>
+          <p:cNvPr id="27" name="Text 25"/>
+          <p:cNvSpPr/>
+          <p:nvPr/>
+        </p:nvSpPr>
+        <p:spPr>
+          <a:xfrm>
+            <a:off x="7119518" y="3383280"/>
+            <a:ext cx="164592" cy="365760"/>
+          </a:xfrm>
+          <a:prstGeom prst="rect">
+            <a:avLst/>
+          </a:prstGeom>
+          <a:noFill/>
+          <a:ln/>
+        </p:spPr>
+        <p:txBody>
+          <a:bodyPr wrap="square" rtlCol="0" anchor="ctr"/>
+          <a:lstStyle/>
+          <a:p>
+            <a:pPr algn="ctr" indent="0" marL="0">
+              <a:buNone/>
+            </a:pPr>
+            <a:r>
+              <a:rPr lang="en-US" sz="1300" dirty="0">
+                <a:solidFill>
+                  <a:srgbClr val="C9D3DA"/>
+                </a:solidFill>
+                <a:latin typeface="PingFang TC" pitchFamily="34" charset="0"/>
+                <a:ea typeface="PingFang TC" pitchFamily="34" charset="-122"/>
+                <a:cs typeface="PingFang TC" pitchFamily="34" charset="-120"/>
+              </a:rPr>
+              <a:t>▶</a:t>
+            </a:r>
+            <a:endParaRPr lang="en-US" sz="1300" dirty="0"/>
+          </a:p>
+        </p:txBody>
+      </p:sp>
+      <p:sp>
+        <p:nvSpPr>
+          <p:cNvPr id="28" name="Shape 26"/>
+          <p:cNvSpPr/>
+          <p:nvPr/>
+        </p:nvSpPr>
+        <p:spPr>
+          <a:xfrm>
+            <a:off x="7293254" y="2487168"/>
+            <a:ext cx="2059229" cy="2395728"/>
+          </a:xfrm>
+          <a:prstGeom prst="roundRect">
+            <a:avLst>
+              <a:gd name="adj" fmla="val 2220"/>
+            </a:avLst>
+          </a:prstGeom>
+          <a:solidFill>
+            <a:srgbClr val="F7F9FA"/>
+          </a:solidFill>
+          <a:ln w="16510">
             <a:solidFill>
               <a:srgbClr val="7E6DA8"/>
             </a:solidFill>
@@ -39482,14 +40357,34 @@
       </p:sp>
       <p:sp>
         <p:nvSpPr>
-          <p:cNvPr id="18" name="Text 16"/>
-          <p:cNvSpPr/>
-          <p:nvPr/>
-        </p:nvSpPr>
-        <p:spPr>
-          <a:xfrm>
-            <a:off x="6364224" y="2468880"/>
-            <a:ext cx="2286000" cy="512064"/>
+          <p:cNvPr id="29" name="Shape 27"/>
+          <p:cNvSpPr/>
+          <p:nvPr/>
+        </p:nvSpPr>
+        <p:spPr>
+          <a:xfrm>
+            <a:off x="7293254" y="2487168"/>
+            <a:ext cx="2059229" cy="45720"/>
+          </a:xfrm>
+          <a:prstGeom prst="rect">
+            <a:avLst/>
+          </a:prstGeom>
+          <a:solidFill>
+            <a:srgbClr val="7E6DA8"/>
+          </a:solidFill>
+          <a:ln/>
+        </p:spPr>
+      </p:sp>
+      <p:sp>
+        <p:nvSpPr>
+          <p:cNvPr id="30" name="Text 28"/>
+          <p:cNvSpPr/>
+          <p:nvPr/>
+        </p:nvSpPr>
+        <p:spPr>
+          <a:xfrm>
+            <a:off x="7384694" y="2615184"/>
+            <a:ext cx="1876349" cy="512064"/>
           </a:xfrm>
           <a:prstGeom prst="rect">
             <a:avLst/>
@@ -39503,12 +40398,12 @@
           <a:p>
             <a:pPr algn="ctr" indent="0" marL="0">
               <a:lnSpc>
-                <a:spcPct val="108000"/>
+                <a:spcPct val="106000"/>
               </a:lnSpc>
               <a:buNone/>
             </a:pPr>
             <a:r>
-              <a:rPr lang="en-US" sz="1700" b="1" dirty="0">
+              <a:rPr lang="en-US" sz="1500" b="1" dirty="0">
                 <a:solidFill>
                   <a:srgbClr val="7E6DA8"/>
                 </a:solidFill>
@@ -39516,22 +40411,81 @@
                 <a:ea typeface="Georgia" pitchFamily="34" charset="-122"/>
                 <a:cs typeface="Georgia" pitchFamily="34" charset="-120"/>
               </a:rPr>
-              <a:t>Controlled Execution</a:t>
-            </a:r>
-            <a:endParaRPr lang="en-US" sz="1700" dirty="0"/>
-          </a:p>
-        </p:txBody>
-      </p:sp>
-      <p:sp>
-        <p:nvSpPr>
-          <p:cNvPr id="19" name="Text 17"/>
-          <p:cNvSpPr/>
-          <p:nvPr/>
-        </p:nvSpPr>
-        <p:spPr>
-          <a:xfrm>
-            <a:off x="6364224" y="3017520"/>
-            <a:ext cx="2286000" cy="585216"/>
+              <a:t>Controlled</a:t>
+            </a:r>
+            <a:endParaRPr lang="en-US" sz="1500" dirty="0"/>
+          </a:p>
+          <a:p>
+            <a:pPr algn="ctr" indent="0" marL="0">
+              <a:lnSpc>
+                <a:spcPct val="106000"/>
+              </a:lnSpc>
+              <a:buNone/>
+            </a:pPr>
+            <a:r>
+              <a:rPr lang="en-US" sz="1500" b="1" dirty="0">
+                <a:solidFill>
+                  <a:srgbClr val="7E6DA8"/>
+                </a:solidFill>
+                <a:latin typeface="Georgia" pitchFamily="34" charset="0"/>
+                <a:ea typeface="Georgia" pitchFamily="34" charset="-122"/>
+                <a:cs typeface="Georgia" pitchFamily="34" charset="-120"/>
+              </a:rPr>
+              <a:t>Execution</a:t>
+            </a:r>
+            <a:endParaRPr lang="en-US" sz="1500" dirty="0"/>
+          </a:p>
+        </p:txBody>
+      </p:sp>
+      <p:sp>
+        <p:nvSpPr>
+          <p:cNvPr id="31" name="Text 29"/>
+          <p:cNvSpPr/>
+          <p:nvPr/>
+        </p:nvSpPr>
+        <p:spPr>
+          <a:xfrm>
+            <a:off x="7384694" y="3145536"/>
+            <a:ext cx="1876349" cy="274320"/>
+          </a:xfrm>
+          <a:prstGeom prst="rect">
+            <a:avLst/>
+          </a:prstGeom>
+          <a:noFill/>
+          <a:ln/>
+        </p:spPr>
+        <p:txBody>
+          <a:bodyPr wrap="square" rtlCol="0" anchor="ctr"/>
+          <a:lstStyle/>
+          <a:p>
+            <a:pPr algn="ctr" indent="0" marL="0">
+              <a:buNone/>
+            </a:pPr>
+            <a:r>
+              <a:rPr lang="en-US" sz="1500" b="1" dirty="0">
+                <a:solidFill>
+                  <a:srgbClr val="13212A"/>
+                </a:solidFill>
+                <a:latin typeface="PingFang TC" pitchFamily="34" charset="0"/>
+                <a:ea typeface="PingFang TC" pitchFamily="34" charset="-122"/>
+                <a:cs typeface="PingFang TC" pitchFamily="34" charset="-120"/>
+              </a:rPr>
+              <a:t>受控執行</a:t>
+            </a:r>
+            <a:endParaRPr lang="en-US" sz="1500" dirty="0"/>
+          </a:p>
+        </p:txBody>
+      </p:sp>
+      <p:sp>
+        <p:nvSpPr>
+          <p:cNvPr id="32" name="Text 30"/>
+          <p:cNvSpPr/>
+          <p:nvPr/>
+        </p:nvSpPr>
+        <p:spPr>
+          <a:xfrm>
+            <a:off x="7421270" y="3474720"/>
+            <a:ext cx="1803197" cy="1316736"/>
           </a:xfrm>
           <a:prstGeom prst="rect">
             <a:avLst/>
@@ -39543,11 +40497,12 @@
           <a:bodyPr wrap="square" rtlCol="0" anchor="t"/>
           <a:lstStyle/>
           <a:p>
-            <a:pPr algn="ctr" indent="0" marL="0">
+            <a:pPr marL="342900" indent="-342900">
               <a:lnSpc>
                 <a:spcPct val="114000"/>
               </a:lnSpc>
-              <a:buNone/>
+              <a:buSzPct val="100000"/>
+              <a:buChar char="•"/>
             </a:pPr>
             <a:r>
               <a:rPr lang="en-US" sz="1500" dirty="0">
@@ -39558,71 +40513,92 @@
                 <a:ea typeface="PingFang TC" pitchFamily="34" charset="-122"/>
                 <a:cs typeface="PingFang TC" pitchFamily="34" charset="-120"/>
               </a:rPr>
-              <a:t>permission · approval · service</a:t>
+              <a:t>只經授權後執行</a:t>
             </a:r>
             <a:endParaRPr lang="en-US" sz="1500" dirty="0"/>
           </a:p>
-        </p:txBody>
-      </p:sp>
-      <p:sp>
-        <p:nvSpPr>
-          <p:cNvPr id="20" name="Text 18"/>
-          <p:cNvSpPr/>
-          <p:nvPr/>
-        </p:nvSpPr>
-        <p:spPr>
-          <a:xfrm>
-            <a:off x="8759952" y="2843784"/>
-            <a:ext cx="347472" cy="365760"/>
-          </a:xfrm>
-          <a:prstGeom prst="rect">
-            <a:avLst/>
-          </a:prstGeom>
-          <a:noFill/>
-          <a:ln/>
-        </p:spPr>
-        <p:txBody>
-          <a:bodyPr wrap="square" rtlCol="0" anchor="ctr"/>
-          <a:lstStyle/>
-          <a:p>
-            <a:pPr algn="ctr" indent="0" marL="0">
-              <a:buNone/>
-            </a:pPr>
-            <a:r>
-              <a:rPr lang="en-US" sz="1600" dirty="0">
-                <a:solidFill>
-                  <a:srgbClr val="C9D3DA"/>
+          <a:p>
+            <a:pPr marL="342900" indent="-342900">
+              <a:lnSpc>
+                <a:spcPct val="114000"/>
+              </a:lnSpc>
+              <a:buSzPct val="100000"/>
+              <a:buChar char="•"/>
+            </a:pPr>
+            <a:r>
+              <a:rPr lang="en-US" sz="1500" dirty="0">
+                <a:solidFill>
+                  <a:srgbClr val="5B6470"/>
                 </a:solidFill>
                 <a:latin typeface="PingFang TC" pitchFamily="34" charset="0"/>
                 <a:ea typeface="PingFang TC" pitchFamily="34" charset="-122"/>
                 <a:cs typeface="PingFang TC" pitchFamily="34" charset="-120"/>
               </a:rPr>
+              <a:t>透過 Service Layer</a:t>
+            </a:r>
+            <a:endParaRPr lang="en-US" sz="1500" dirty="0"/>
+          </a:p>
+        </p:txBody>
+      </p:sp>
+      <p:sp>
+        <p:nvSpPr>
+          <p:cNvPr id="33" name="Text 31"/>
+          <p:cNvSpPr/>
+          <p:nvPr/>
+        </p:nvSpPr>
+        <p:spPr>
+          <a:xfrm>
+            <a:off x="9361627" y="3383280"/>
+            <a:ext cx="164592" cy="365760"/>
+          </a:xfrm>
+          <a:prstGeom prst="rect">
+            <a:avLst/>
+          </a:prstGeom>
+          <a:noFill/>
+          <a:ln/>
+        </p:spPr>
+        <p:txBody>
+          <a:bodyPr wrap="square" rtlCol="0" anchor="ctr"/>
+          <a:lstStyle/>
+          <a:p>
+            <a:pPr algn="ctr" indent="0" marL="0">
+              <a:buNone/>
+            </a:pPr>
+            <a:r>
+              <a:rPr lang="en-US" sz="1300" dirty="0">
+                <a:solidFill>
+                  <a:srgbClr val="C9D3DA"/>
+                </a:solidFill>
+                <a:latin typeface="PingFang TC" pitchFamily="34" charset="0"/>
+                <a:ea typeface="PingFang TC" pitchFamily="34" charset="-122"/>
+                <a:cs typeface="PingFang TC" pitchFamily="34" charset="-120"/>
+              </a:rPr>
               <a:t>▶</a:t>
             </a:r>
-            <a:endParaRPr lang="en-US" sz="1600" dirty="0"/>
-          </a:p>
-        </p:txBody>
-      </p:sp>
-      <p:sp>
-        <p:nvSpPr>
-          <p:cNvPr id="21" name="Shape 19"/>
-          <p:cNvSpPr/>
-          <p:nvPr/>
-        </p:nvSpPr>
-        <p:spPr>
-          <a:xfrm>
-            <a:off x="9125712" y="2340864"/>
-            <a:ext cx="2468880" cy="1371600"/>
+            <a:endParaRPr lang="en-US" sz="1300" dirty="0"/>
+          </a:p>
+        </p:txBody>
+      </p:sp>
+      <p:sp>
+        <p:nvSpPr>
+          <p:cNvPr id="34" name="Shape 32"/>
+          <p:cNvSpPr/>
+          <p:nvPr/>
+        </p:nvSpPr>
+        <p:spPr>
+          <a:xfrm>
+            <a:off x="9535363" y="2487168"/>
+            <a:ext cx="2059229" cy="2395728"/>
           </a:xfrm>
           <a:prstGeom prst="roundRect">
             <a:avLst>
-              <a:gd name="adj" fmla="val 3333"/>
+              <a:gd name="adj" fmla="val 2220"/>
             </a:avLst>
           </a:prstGeom>
           <a:solidFill>
             <a:srgbClr val="F7F9FA"/>
           </a:solidFill>
-          <a:ln w="17780">
+          <a:ln w="16510">
             <a:solidFill>
               <a:srgbClr val="5E8F72"/>
             </a:solidFill>
@@ -39632,14 +40608,34 @@
       </p:sp>
       <p:sp>
         <p:nvSpPr>
-          <p:cNvPr id="22" name="Text 20"/>
-          <p:cNvSpPr/>
-          <p:nvPr/>
-        </p:nvSpPr>
-        <p:spPr>
-          <a:xfrm>
-            <a:off x="9217152" y="2468880"/>
-            <a:ext cx="2286000" cy="512064"/>
+          <p:cNvPr id="35" name="Shape 33"/>
+          <p:cNvSpPr/>
+          <p:nvPr/>
+        </p:nvSpPr>
+        <p:spPr>
+          <a:xfrm>
+            <a:off x="9535363" y="2487168"/>
+            <a:ext cx="2059229" cy="45720"/>
+          </a:xfrm>
+          <a:prstGeom prst="rect">
+            <a:avLst/>
+          </a:prstGeom>
+          <a:solidFill>
+            <a:srgbClr val="5E8F72"/>
+          </a:solidFill>
+          <a:ln/>
+        </p:spPr>
+      </p:sp>
+      <p:sp>
+        <p:nvSpPr>
+          <p:cNvPr id="36" name="Text 34"/>
+          <p:cNvSpPr/>
+          <p:nvPr/>
+        </p:nvSpPr>
+        <p:spPr>
+          <a:xfrm>
+            <a:off x="9626803" y="2615184"/>
+            <a:ext cx="1876349" cy="512064"/>
           </a:xfrm>
           <a:prstGeom prst="rect">
             <a:avLst/>
@@ -39653,12 +40649,12 @@
           <a:p>
             <a:pPr algn="ctr" indent="0" marL="0">
               <a:lnSpc>
-                <a:spcPct val="108000"/>
+                <a:spcPct val="106000"/>
               </a:lnSpc>
               <a:buNone/>
             </a:pPr>
             <a:r>
-              <a:rPr lang="en-US" sz="1700" b="1" dirty="0">
+              <a:rPr lang="en-US" sz="1500" b="1" dirty="0">
                 <a:solidFill>
                   <a:srgbClr val="5E8F72"/>
                 </a:solidFill>
@@ -39666,22 +40662,81 @@
                 <a:ea typeface="Georgia" pitchFamily="34" charset="-122"/>
                 <a:cs typeface="Georgia" pitchFamily="34" charset="-120"/>
               </a:rPr>
-              <a:t>Objective Evaluation</a:t>
-            </a:r>
-            <a:endParaRPr lang="en-US" sz="1700" dirty="0"/>
-          </a:p>
-        </p:txBody>
-      </p:sp>
-      <p:sp>
-        <p:nvSpPr>
-          <p:cNvPr id="23" name="Text 21"/>
-          <p:cNvSpPr/>
-          <p:nvPr/>
-        </p:nvSpPr>
-        <p:spPr>
-          <a:xfrm>
-            <a:off x="9217152" y="3017520"/>
-            <a:ext cx="2286000" cy="585216"/>
+              <a:t>Objective</a:t>
+            </a:r>
+            <a:endParaRPr lang="en-US" sz="1500" dirty="0"/>
+          </a:p>
+          <a:p>
+            <a:pPr algn="ctr" indent="0" marL="0">
+              <a:lnSpc>
+                <a:spcPct val="106000"/>
+              </a:lnSpc>
+              <a:buNone/>
+            </a:pPr>
+            <a:r>
+              <a:rPr lang="en-US" sz="1500" b="1" dirty="0">
+                <a:solidFill>
+                  <a:srgbClr val="5E8F72"/>
+                </a:solidFill>
+                <a:latin typeface="Georgia" pitchFamily="34" charset="0"/>
+                <a:ea typeface="Georgia" pitchFamily="34" charset="-122"/>
+                <a:cs typeface="Georgia" pitchFamily="34" charset="-120"/>
+              </a:rPr>
+              <a:t>Evaluation</a:t>
+            </a:r>
+            <a:endParaRPr lang="en-US" sz="1500" dirty="0"/>
+          </a:p>
+        </p:txBody>
+      </p:sp>
+      <p:sp>
+        <p:nvSpPr>
+          <p:cNvPr id="37" name="Text 35"/>
+          <p:cNvSpPr/>
+          <p:nvPr/>
+        </p:nvSpPr>
+        <p:spPr>
+          <a:xfrm>
+            <a:off x="9626803" y="3145536"/>
+            <a:ext cx="1876349" cy="274320"/>
+          </a:xfrm>
+          <a:prstGeom prst="rect">
+            <a:avLst/>
+          </a:prstGeom>
+          <a:noFill/>
+          <a:ln/>
+        </p:spPr>
+        <p:txBody>
+          <a:bodyPr wrap="square" rtlCol="0" anchor="ctr"/>
+          <a:lstStyle/>
+          <a:p>
+            <a:pPr algn="ctr" indent="0" marL="0">
+              <a:buNone/>
+            </a:pPr>
+            <a:r>
+              <a:rPr lang="en-US" sz="1500" b="1" dirty="0">
+                <a:solidFill>
+                  <a:srgbClr val="13212A"/>
+                </a:solidFill>
+                <a:latin typeface="PingFang TC" pitchFamily="34" charset="0"/>
+                <a:ea typeface="PingFang TC" pitchFamily="34" charset="-122"/>
+                <a:cs typeface="PingFang TC" pitchFamily="34" charset="-120"/>
+              </a:rPr>
+              <a:t>客觀量測可靠度</a:t>
+            </a:r>
+            <a:endParaRPr lang="en-US" sz="1500" dirty="0"/>
+          </a:p>
+        </p:txBody>
+      </p:sp>
+      <p:sp>
+        <p:nvSpPr>
+          <p:cNvPr id="38" name="Text 36"/>
+          <p:cNvSpPr/>
+          <p:nvPr/>
+        </p:nvSpPr>
+        <p:spPr>
+          <a:xfrm>
+            <a:off x="9663379" y="3474720"/>
+            <a:ext cx="1803197" cy="1316736"/>
           </a:xfrm>
           <a:prstGeom prst="rect">
             <a:avLst/>
@@ -39693,11 +40748,12 @@
           <a:bodyPr wrap="square" rtlCol="0" anchor="t"/>
           <a:lstStyle/>
           <a:p>
-            <a:pPr algn="ctr" indent="0" marL="0">
+            <a:pPr marL="342900" indent="-342900">
               <a:lnSpc>
                 <a:spcPct val="114000"/>
               </a:lnSpc>
-              <a:buNone/>
+              <a:buSzPct val="100000"/>
+              <a:buChar char="•"/>
             </a:pPr>
             <a:r>
               <a:rPr lang="en-US" sz="1500" dirty="0">
@@ -39708,49 +40764,103 @@
                 <a:ea typeface="PingFang TC" pitchFamily="34" charset="-122"/>
                 <a:cs typeface="PingFang TC" pitchFamily="34" charset="-120"/>
               </a:rPr>
-              <a:t>real model · deterministic verifier</a:t>
+              <a:t>真實模型</a:t>
             </a:r>
             <a:endParaRPr lang="en-US" sz="1500" dirty="0"/>
           </a:p>
-        </p:txBody>
-      </p:sp>
-      <p:sp>
-        <p:nvSpPr>
-          <p:cNvPr id="24" name="Shape 22"/>
-          <p:cNvSpPr/>
-          <p:nvPr/>
-        </p:nvSpPr>
-        <p:spPr>
-          <a:xfrm>
-            <a:off x="566928" y="3931920"/>
-            <a:ext cx="3553968" cy="2139696"/>
-          </a:xfrm>
-          <a:prstGeom prst="roundRect">
-            <a:avLst>
-              <a:gd name="adj" fmla="val 2137"/>
-            </a:avLst>
-          </a:prstGeom>
-          <a:solidFill>
-            <a:srgbClr val="F7F9FA"/>
-          </a:solidFill>
-          <a:ln w="9525">
-            <a:solidFill>
-              <a:srgbClr val="C9D3DA"/>
-            </a:solidFill>
-            <a:prstDash val="solid"/>
-          </a:ln>
-        </p:spPr>
-      </p:sp>
-      <p:sp>
-        <p:nvSpPr>
-          <p:cNvPr id="25" name="Shape 23"/>
-          <p:cNvSpPr/>
-          <p:nvPr/>
-        </p:nvSpPr>
-        <p:spPr>
-          <a:xfrm>
-            <a:off x="566928" y="3931920"/>
-            <a:ext cx="3553968" cy="45720"/>
+          <a:p>
+            <a:pPr marL="342900" indent="-342900">
+              <a:lnSpc>
+                <a:spcPct val="114000"/>
+              </a:lnSpc>
+              <a:buSzPct val="100000"/>
+              <a:buChar char="•"/>
+            </a:pPr>
+            <a:r>
+              <a:rPr lang="en-US" sz="1500" dirty="0">
+                <a:solidFill>
+                  <a:srgbClr val="5B6470"/>
+                </a:solidFill>
+                <a:latin typeface="PingFang TC" pitchFamily="34" charset="0"/>
+                <a:ea typeface="PingFang TC" pitchFamily="34" charset="-122"/>
+                <a:cs typeface="PingFang TC" pitchFamily="34" charset="-120"/>
+              </a:rPr>
+              <a:t>正式 API</a:t>
+            </a:r>
+            <a:endParaRPr lang="en-US" sz="1500" dirty="0"/>
+          </a:p>
+          <a:p>
+            <a:pPr marL="342900" indent="-342900">
+              <a:lnSpc>
+                <a:spcPct val="114000"/>
+              </a:lnSpc>
+              <a:buSzPct val="100000"/>
+              <a:buChar char="•"/>
+            </a:pPr>
+            <a:r>
+              <a:rPr lang="en-US" sz="1500" dirty="0">
+                <a:solidFill>
+                  <a:srgbClr val="5B6470"/>
+                </a:solidFill>
+                <a:latin typeface="PingFang TC" pitchFamily="34" charset="0"/>
+                <a:ea typeface="PingFang TC" pitchFamily="34" charset="-122"/>
+                <a:cs typeface="PingFang TC" pitchFamily="34" charset="-120"/>
+              </a:rPr>
+              <a:t>確定性 Verifier</a:t>
+            </a:r>
+            <a:endParaRPr lang="en-US" sz="1500" dirty="0"/>
+          </a:p>
+        </p:txBody>
+      </p:sp>
+      <p:sp>
+        <p:nvSpPr>
+          <p:cNvPr id="39" name="Text 37"/>
+          <p:cNvSpPr/>
+          <p:nvPr/>
+        </p:nvSpPr>
+        <p:spPr>
+          <a:xfrm>
+            <a:off x="566928" y="5029200"/>
+            <a:ext cx="2743200" cy="256032"/>
+          </a:xfrm>
+          <a:prstGeom prst="rect">
+            <a:avLst/>
+          </a:prstGeom>
+          <a:noFill/>
+          <a:ln/>
+        </p:spPr>
+        <p:txBody>
+          <a:bodyPr wrap="square" rtlCol="0" anchor="ctr"/>
+          <a:lstStyle/>
+          <a:p>
+            <a:pPr indent="0" marL="0">
+              <a:buNone/>
+            </a:pPr>
+            <a:r>
+              <a:rPr lang="en-US" sz="1700" b="1" dirty="0">
+                <a:solidFill>
+                  <a:srgbClr val="13212A"/>
+                </a:solidFill>
+                <a:latin typeface="PingFang TC" pitchFamily="34" charset="0"/>
+                <a:ea typeface="PingFang TC" pitchFamily="34" charset="-122"/>
+                <a:cs typeface="PingFang TC" pitchFamily="34" charset="-120"/>
+              </a:rPr>
+              <a:t>設計原則</a:t>
+            </a:r>
+            <a:endParaRPr lang="en-US" sz="1700" dirty="0"/>
+          </a:p>
+        </p:txBody>
+      </p:sp>
+      <p:sp>
+        <p:nvSpPr>
+          <p:cNvPr id="40" name="Shape 38"/>
+          <p:cNvSpPr/>
+          <p:nvPr/>
+        </p:nvSpPr>
+        <p:spPr>
+          <a:xfrm>
+            <a:off x="566928" y="5321808"/>
+            <a:ext cx="3553968" cy="36576"/>
           </a:xfrm>
           <a:prstGeom prst="rect">
             <a:avLst/>
@@ -39763,14 +40873,14 @@
       </p:sp>
       <p:sp>
         <p:nvSpPr>
-          <p:cNvPr id="26" name="Text 24"/>
-          <p:cNvSpPr/>
-          <p:nvPr/>
-        </p:nvSpPr>
-        <p:spPr>
-          <a:xfrm>
-            <a:off x="749808" y="4078224"/>
-            <a:ext cx="329184" cy="292608"/>
+          <p:cNvPr id="41" name="Text 39"/>
+          <p:cNvSpPr/>
+          <p:nvPr/>
+        </p:nvSpPr>
+        <p:spPr>
+          <a:xfrm>
+            <a:off x="566928" y="5413248"/>
+            <a:ext cx="3553968" cy="274320"/>
           </a:xfrm>
           <a:prstGeom prst="rect">
             <a:avLst/>
@@ -39786,30 +40896,92 @@
               <a:buNone/>
             </a:pPr>
             <a:r>
-              <a:rPr lang="en-US" sz="1900" b="1" dirty="0">
-                <a:solidFill>
-                  <a:srgbClr val="2F6F8F"/>
+              <a:rPr lang="en-US" sz="1700" b="1" dirty="0">
+                <a:solidFill>
+                  <a:srgbClr val="13212A"/>
                 </a:solidFill>
                 <a:latin typeface="Georgia" pitchFamily="34" charset="0"/>
                 <a:ea typeface="Georgia" pitchFamily="34" charset="-122"/>
                 <a:cs typeface="Georgia" pitchFamily="34" charset="-120"/>
               </a:rPr>
-              <a:t>1</a:t>
-            </a:r>
-            <a:endParaRPr lang="en-US" sz="1900" dirty="0"/>
-          </a:p>
-        </p:txBody>
-      </p:sp>
-      <p:sp>
-        <p:nvSpPr>
-          <p:cNvPr id="27" name="Text 25"/>
-          <p:cNvSpPr/>
-          <p:nvPr/>
-        </p:nvSpPr>
-        <p:spPr>
-          <a:xfrm>
-            <a:off x="1097280" y="4078224"/>
-            <a:ext cx="2840736" cy="292608"/>
+              <a:t>1　Structure behavior</a:t>
+            </a:r>
+            <a:endParaRPr lang="en-US" sz="1700" dirty="0"/>
+          </a:p>
+        </p:txBody>
+      </p:sp>
+      <p:sp>
+        <p:nvSpPr>
+          <p:cNvPr id="42" name="Text 40"/>
+          <p:cNvSpPr/>
+          <p:nvPr/>
+        </p:nvSpPr>
+        <p:spPr>
+          <a:xfrm>
+            <a:off x="566928" y="5705856"/>
+            <a:ext cx="3553968" cy="566928"/>
+          </a:xfrm>
+          <a:prstGeom prst="rect">
+            <a:avLst/>
+          </a:prstGeom>
+          <a:noFill/>
+          <a:ln/>
+        </p:spPr>
+        <p:txBody>
+          <a:bodyPr wrap="square" rtlCol="0" anchor="t"/>
+          <a:lstStyle/>
+          <a:p>
+            <a:pPr indent="0" marL="0">
+              <a:lnSpc>
+                <a:spcPct val="116000"/>
+              </a:lnSpc>
+              <a:buNone/>
+            </a:pPr>
+            <a:r>
+              <a:rPr lang="en-US" sz="1500" dirty="0">
+                <a:solidFill>
+                  <a:srgbClr val="5B6470"/>
+                </a:solidFill>
+                <a:latin typeface="PingFang TC" pitchFamily="34" charset="0"/>
+                <a:ea typeface="PingFang TC" pitchFamily="34" charset="-122"/>
+                <a:cs typeface="PingFang TC" pitchFamily="34" charset="-120"/>
+              </a:rPr>
+              <a:t>限制輸出格式與合法技能，先形成完整計畫。</a:t>
+            </a:r>
+            <a:endParaRPr lang="en-US" sz="1500" dirty="0"/>
+          </a:p>
+        </p:txBody>
+      </p:sp>
+      <p:sp>
+        <p:nvSpPr>
+          <p:cNvPr id="43" name="Shape 41"/>
+          <p:cNvSpPr/>
+          <p:nvPr/>
+        </p:nvSpPr>
+        <p:spPr>
+          <a:xfrm>
+            <a:off x="4303776" y="5321808"/>
+            <a:ext cx="3553968" cy="36576"/>
+          </a:xfrm>
+          <a:prstGeom prst="rect">
+            <a:avLst/>
+          </a:prstGeom>
+          <a:solidFill>
+            <a:srgbClr val="B06A66"/>
+          </a:solidFill>
+          <a:ln/>
+        </p:spPr>
+      </p:sp>
+      <p:sp>
+        <p:nvSpPr>
+          <p:cNvPr id="44" name="Text 42"/>
+          <p:cNvSpPr/>
+          <p:nvPr/>
+        </p:nvSpPr>
+        <p:spPr>
+          <a:xfrm>
+            <a:off x="4303776" y="5413248"/>
+            <a:ext cx="3553968" cy="274320"/>
           </a:xfrm>
           <a:prstGeom prst="rect">
             <a:avLst/>
@@ -39833,7 +41005,7 @@
                 <a:ea typeface="Georgia" pitchFamily="34" charset="-122"/>
                 <a:cs typeface="Georgia" pitchFamily="34" charset="-120"/>
               </a:rPr>
-              <a:t>Structure behavior</a:t>
+              <a:t>2　Govern execution</a:t>
             </a:r>
             <a:endParaRPr lang="en-US" sz="1700" dirty="0"/>
           </a:p>
@@ -39841,14 +41013,14 @@
       </p:sp>
       <p:sp>
         <p:nvSpPr>
-          <p:cNvPr id="28" name="Text 26"/>
-          <p:cNvSpPr/>
-          <p:nvPr/>
-        </p:nvSpPr>
-        <p:spPr>
-          <a:xfrm>
-            <a:off x="749808" y="4480560"/>
-            <a:ext cx="3188208" cy="1463040"/>
+          <p:cNvPr id="45" name="Text 43"/>
+          <p:cNvSpPr/>
+          <p:nvPr/>
+        </p:nvSpPr>
+        <p:spPr>
+          <a:xfrm>
+            <a:off x="4303776" y="5705856"/>
+            <a:ext cx="3553968" cy="566928"/>
           </a:xfrm>
           <a:prstGeom prst="rect">
             <a:avLst/>
@@ -39862,7 +41034,7 @@
           <a:p>
             <a:pPr indent="0" marL="0">
               <a:lnSpc>
-                <a:spcPct val="118000"/>
+                <a:spcPct val="116000"/>
               </a:lnSpc>
               <a:buNone/>
             </a:pPr>
@@ -39875,7 +41047,7 @@
                 <a:ea typeface="PingFang TC" pitchFamily="34" charset="-122"/>
                 <a:cs typeface="PingFang TC" pitchFamily="34" charset="-120"/>
               </a:rPr>
-              <a:t>限制輸出格式與合法技能，先形成完整計畫。</a:t>
+              <a:t>唯讀自動；寫入與生成技能必須經權限與人工核可。</a:t>
             </a:r>
             <a:endParaRPr lang="en-US" sz="1500" dirty="0"/>
           </a:p>
@@ -39883,61 +41055,34 @@
       </p:sp>
       <p:sp>
         <p:nvSpPr>
-          <p:cNvPr id="29" name="Shape 27"/>
-          <p:cNvSpPr/>
-          <p:nvPr/>
-        </p:nvSpPr>
-        <p:spPr>
-          <a:xfrm>
-            <a:off x="4303776" y="3931920"/>
-            <a:ext cx="3553968" cy="2139696"/>
-          </a:xfrm>
-          <a:prstGeom prst="roundRect">
-            <a:avLst>
-              <a:gd name="adj" fmla="val 2137"/>
-            </a:avLst>
+          <p:cNvPr id="46" name="Shape 44"/>
+          <p:cNvSpPr/>
+          <p:nvPr/>
+        </p:nvSpPr>
+        <p:spPr>
+          <a:xfrm>
+            <a:off x="8040624" y="5321808"/>
+            <a:ext cx="3553968" cy="36576"/>
+          </a:xfrm>
+          <a:prstGeom prst="rect">
+            <a:avLst/>
           </a:prstGeom>
           <a:solidFill>
-            <a:srgbClr val="F7F9FA"/>
+            <a:srgbClr val="5E8F72"/>
           </a:solidFill>
-          <a:ln w="9525">
-            <a:solidFill>
-              <a:srgbClr val="C9D3DA"/>
-            </a:solidFill>
-            <a:prstDash val="solid"/>
-          </a:ln>
-        </p:spPr>
-      </p:sp>
-      <p:sp>
-        <p:nvSpPr>
-          <p:cNvPr id="30" name="Shape 28"/>
-          <p:cNvSpPr/>
-          <p:nvPr/>
-        </p:nvSpPr>
-        <p:spPr>
-          <a:xfrm>
-            <a:off x="4303776" y="3931920"/>
-            <a:ext cx="3553968" cy="45720"/>
-          </a:xfrm>
-          <a:prstGeom prst="rect">
-            <a:avLst/>
-          </a:prstGeom>
-          <a:solidFill>
-            <a:srgbClr val="7E6DA8"/>
-          </a:solidFill>
-          <a:ln/>
-        </p:spPr>
-      </p:sp>
-      <p:sp>
-        <p:nvSpPr>
-          <p:cNvPr id="31" name="Text 29"/>
-          <p:cNvSpPr/>
-          <p:nvPr/>
-        </p:nvSpPr>
-        <p:spPr>
-          <a:xfrm>
-            <a:off x="4486656" y="4078224"/>
-            <a:ext cx="329184" cy="292608"/>
+          <a:ln/>
+        </p:spPr>
+      </p:sp>
+      <p:sp>
+        <p:nvSpPr>
+          <p:cNvPr id="47" name="Text 45"/>
+          <p:cNvSpPr/>
+          <p:nvPr/>
+        </p:nvSpPr>
+        <p:spPr>
+          <a:xfrm>
+            <a:off x="8040624" y="5413248"/>
+            <a:ext cx="3553968" cy="274320"/>
           </a:xfrm>
           <a:prstGeom prst="rect">
             <a:avLst/>
@@ -39953,54 +41098,15 @@
               <a:buNone/>
             </a:pPr>
             <a:r>
-              <a:rPr lang="en-US" sz="1900" b="1" dirty="0">
-                <a:solidFill>
-                  <a:srgbClr val="7E6DA8"/>
+              <a:rPr lang="en-US" sz="1700" b="1" dirty="0">
+                <a:solidFill>
+                  <a:srgbClr val="13212A"/>
                 </a:solidFill>
                 <a:latin typeface="Georgia" pitchFamily="34" charset="0"/>
                 <a:ea typeface="Georgia" pitchFamily="34" charset="-122"/>
                 <a:cs typeface="Georgia" pitchFamily="34" charset="-120"/>
               </a:rPr>
-              <a:t>2</a:t>
-            </a:r>
-            <a:endParaRPr lang="en-US" sz="1900" dirty="0"/>
-          </a:p>
-        </p:txBody>
-      </p:sp>
-      <p:sp>
-        <p:nvSpPr>
-          <p:cNvPr id="32" name="Text 30"/>
-          <p:cNvSpPr/>
-          <p:nvPr/>
-        </p:nvSpPr>
-        <p:spPr>
-          <a:xfrm>
-            <a:off x="4834128" y="4078224"/>
-            <a:ext cx="2840736" cy="292608"/>
-          </a:xfrm>
-          <a:prstGeom prst="rect">
-            <a:avLst/>
-          </a:prstGeom>
-          <a:noFill/>
-          <a:ln/>
-        </p:spPr>
-        <p:txBody>
-          <a:bodyPr wrap="square" rtlCol="0" anchor="ctr"/>
-          <a:lstStyle/>
-          <a:p>
-            <a:pPr indent="0" marL="0">
-              <a:buNone/>
-            </a:pPr>
-            <a:r>
-              <a:rPr lang="en-US" sz="1700" b="1" dirty="0">
-                <a:solidFill>
-                  <a:srgbClr val="13212A"/>
-                </a:solidFill>
-                <a:latin typeface="Georgia" pitchFamily="34" charset="0"/>
-                <a:ea typeface="Georgia" pitchFamily="34" charset="-122"/>
-                <a:cs typeface="Georgia" pitchFamily="34" charset="-120"/>
-              </a:rPr>
-              <a:t>Govern execution</a:t>
+              <a:t>3　Measure reliability</a:t>
             </a:r>
             <a:endParaRPr lang="en-US" sz="1700" dirty="0"/>
           </a:p>
@@ -40008,14 +41114,14 @@
       </p:sp>
       <p:sp>
         <p:nvSpPr>
-          <p:cNvPr id="33" name="Text 31"/>
-          <p:cNvSpPr/>
-          <p:nvPr/>
-        </p:nvSpPr>
-        <p:spPr>
-          <a:xfrm>
-            <a:off x="4486656" y="4480560"/>
-            <a:ext cx="3188208" cy="1463040"/>
+          <p:cNvPr id="48" name="Text 46"/>
+          <p:cNvSpPr/>
+          <p:nvPr/>
+        </p:nvSpPr>
+        <p:spPr>
+          <a:xfrm>
+            <a:off x="8040624" y="5705856"/>
+            <a:ext cx="3553968" cy="566928"/>
           </a:xfrm>
           <a:prstGeom prst="rect">
             <a:avLst/>
@@ -40029,174 +41135,7 @@
           <a:p>
             <a:pPr indent="0" marL="0">
               <a:lnSpc>
-                <a:spcPct val="118000"/>
-              </a:lnSpc>
-              <a:buNone/>
-            </a:pPr>
-            <a:r>
-              <a:rPr lang="en-US" sz="1500" dirty="0">
-                <a:solidFill>
-                  <a:srgbClr val="5B6470"/>
-                </a:solidFill>
-                <a:latin typeface="PingFang TC" pitchFamily="34" charset="0"/>
-                <a:ea typeface="PingFang TC" pitchFamily="34" charset="-122"/>
-                <a:cs typeface="PingFang TC" pitchFamily="34" charset="-120"/>
-              </a:rPr>
-              <a:t>唯讀自動；寫入與生成技能必須經權限與人工核可。</a:t>
-            </a:r>
-            <a:endParaRPr lang="en-US" sz="1500" dirty="0"/>
-          </a:p>
-        </p:txBody>
-      </p:sp>
-      <p:sp>
-        <p:nvSpPr>
-          <p:cNvPr id="34" name="Shape 32"/>
-          <p:cNvSpPr/>
-          <p:nvPr/>
-        </p:nvSpPr>
-        <p:spPr>
-          <a:xfrm>
-            <a:off x="8040624" y="3931920"/>
-            <a:ext cx="3553968" cy="2139696"/>
-          </a:xfrm>
-          <a:prstGeom prst="roundRect">
-            <a:avLst>
-              <a:gd name="adj" fmla="val 2137"/>
-            </a:avLst>
-          </a:prstGeom>
-          <a:solidFill>
-            <a:srgbClr val="F7F9FA"/>
-          </a:solidFill>
-          <a:ln w="9525">
-            <a:solidFill>
-              <a:srgbClr val="C9D3DA"/>
-            </a:solidFill>
-            <a:prstDash val="solid"/>
-          </a:ln>
-        </p:spPr>
-      </p:sp>
-      <p:sp>
-        <p:nvSpPr>
-          <p:cNvPr id="35" name="Shape 33"/>
-          <p:cNvSpPr/>
-          <p:nvPr/>
-        </p:nvSpPr>
-        <p:spPr>
-          <a:xfrm>
-            <a:off x="8040624" y="3931920"/>
-            <a:ext cx="3553968" cy="45720"/>
-          </a:xfrm>
-          <a:prstGeom prst="rect">
-            <a:avLst/>
-          </a:prstGeom>
-          <a:solidFill>
-            <a:srgbClr val="5E8F72"/>
-          </a:solidFill>
-          <a:ln/>
-        </p:spPr>
-      </p:sp>
-      <p:sp>
-        <p:nvSpPr>
-          <p:cNvPr id="36" name="Text 34"/>
-          <p:cNvSpPr/>
-          <p:nvPr/>
-        </p:nvSpPr>
-        <p:spPr>
-          <a:xfrm>
-            <a:off x="8223504" y="4078224"/>
-            <a:ext cx="329184" cy="292608"/>
-          </a:xfrm>
-          <a:prstGeom prst="rect">
-            <a:avLst/>
-          </a:prstGeom>
-          <a:noFill/>
-          <a:ln/>
-        </p:spPr>
-        <p:txBody>
-          <a:bodyPr wrap="square" rtlCol="0" anchor="ctr"/>
-          <a:lstStyle/>
-          <a:p>
-            <a:pPr indent="0" marL="0">
-              <a:buNone/>
-            </a:pPr>
-            <a:r>
-              <a:rPr lang="en-US" sz="1900" b="1" dirty="0">
-                <a:solidFill>
-                  <a:srgbClr val="5E8F72"/>
-                </a:solidFill>
-                <a:latin typeface="Georgia" pitchFamily="34" charset="0"/>
-                <a:ea typeface="Georgia" pitchFamily="34" charset="-122"/>
-                <a:cs typeface="Georgia" pitchFamily="34" charset="-120"/>
-              </a:rPr>
-              <a:t>3</a:t>
-            </a:r>
-            <a:endParaRPr lang="en-US" sz="1900" dirty="0"/>
-          </a:p>
-        </p:txBody>
-      </p:sp>
-      <p:sp>
-        <p:nvSpPr>
-          <p:cNvPr id="37" name="Text 35"/>
-          <p:cNvSpPr/>
-          <p:nvPr/>
-        </p:nvSpPr>
-        <p:spPr>
-          <a:xfrm>
-            <a:off x="8570976" y="4078224"/>
-            <a:ext cx="2840736" cy="292608"/>
-          </a:xfrm>
-          <a:prstGeom prst="rect">
-            <a:avLst/>
-          </a:prstGeom>
-          <a:noFill/>
-          <a:ln/>
-        </p:spPr>
-        <p:txBody>
-          <a:bodyPr wrap="square" rtlCol="0" anchor="ctr"/>
-          <a:lstStyle/>
-          <a:p>
-            <a:pPr indent="0" marL="0">
-              <a:buNone/>
-            </a:pPr>
-            <a:r>
-              <a:rPr lang="en-US" sz="1700" b="1" dirty="0">
-                <a:solidFill>
-                  <a:srgbClr val="13212A"/>
-                </a:solidFill>
-                <a:latin typeface="Georgia" pitchFamily="34" charset="0"/>
-                <a:ea typeface="Georgia" pitchFamily="34" charset="-122"/>
-                <a:cs typeface="Georgia" pitchFamily="34" charset="-120"/>
-              </a:rPr>
-              <a:t>Measure reliability</a:t>
-            </a:r>
-            <a:endParaRPr lang="en-US" sz="1700" dirty="0"/>
-          </a:p>
-        </p:txBody>
-      </p:sp>
-      <p:sp>
-        <p:nvSpPr>
-          <p:cNvPr id="38" name="Text 36"/>
-          <p:cNvSpPr/>
-          <p:nvPr/>
-        </p:nvSpPr>
-        <p:spPr>
-          <a:xfrm>
-            <a:off x="8223504" y="4480560"/>
-            <a:ext cx="3188208" cy="1463040"/>
-          </a:xfrm>
-          <a:prstGeom prst="rect">
-            <a:avLst/>
-          </a:prstGeom>
-          <a:noFill/>
-          <a:ln/>
-        </p:spPr>
-        <p:txBody>
-          <a:bodyPr wrap="square" rtlCol="0" anchor="t"/>
-          <a:lstStyle/>
-          <a:p>
-            <a:pPr indent="0" marL="0">
-              <a:lnSpc>
-                <a:spcPct val="118000"/>
+                <a:spcPct val="116000"/>
               </a:lnSpc>
               <a:buNone/>
             </a:pPr>
